--- a/Tinker_RL_Demo.pptx
+++ b/Tinker_RL_Demo.pptx
@@ -18,6 +18,7 @@
     <p:sldId id="266" r:id="rId17"/>
     <p:sldId id="267" r:id="rId18"/>
     <p:sldId id="268" r:id="rId19"/>
+    <p:sldId id="269" r:id="rId20"/>
   </p:sldIdLst>
   <p:sldSz cx="9144000" cy="6858000" type="screen4x3"/>
   <p:notesSz cx="6858000" cy="9144000"/>
@@ -3130,7 +3131,7 @@
               </a:defRPr>
             </a:pPr>
             <a:r>
-              <a:t>Reinforcement Learning for LLMs with Tinker</a:t>
+              <a:t>Reinforcement Learning for LLMs</a:t>
             </a:r>
           </a:p>
         </p:txBody>
@@ -3144,7 +3145,7 @@
         <p:spPr>
           <a:xfrm>
             <a:off x="457200" y="3657600"/>
-            <a:ext cx="8229600" cy="914400"/>
+            <a:ext cx="8229600" cy="1097280"/>
           </a:xfrm>
           <a:prstGeom prst="rect">
             <a:avLst/>
@@ -3165,7 +3166,7 @@
               </a:defRPr>
             </a:pPr>
             <a:r>
-              <a:t>Training Language Models with Human Feedback</a:t>
+              <a:t>Training Language Models with Tinker</a:t>
             </a:r>
             <a:br/>
             <a:br/>
@@ -3201,8 +3202,8 @@
         </p:nvSpPr>
         <p:spPr>
           <a:xfrm>
-            <a:off x="457200" y="274320"/>
-            <a:ext cx="8229600" cy="914400"/>
+            <a:off x="457200" y="182880"/>
+            <a:ext cx="8229600" cy="548640"/>
           </a:xfrm>
           <a:prstGeom prst="rect">
             <a:avLst/>
@@ -3216,28 +3217,71 @@
           <a:lstStyle/>
           <a:p>
             <a:pPr>
-              <a:defRPr sz="3200" b="1">
+              <a:defRPr sz="2600" b="1">
                 <a:solidFill>
                   <a:srgbClr val="1A1A2E"/>
                 </a:solidFill>
               </a:defRPr>
             </a:pPr>
             <a:r>
-              <a:t>Jupyter Notebooks Created</a:t>
-            </a:r>
-          </a:p>
-        </p:txBody>
-      </p:sp>
-      <p:sp>
-        <p:nvSpPr>
-          <p:cNvPr id="3" name="TextBox 2"/>
+              <a:t>Example: Math RL Training</a:t>
+            </a:r>
+          </a:p>
+        </p:txBody>
+      </p:sp>
+      <p:sp>
+        <p:nvSpPr>
+          <p:cNvPr id="3" name="Rounded Rectangle 2"/>
+          <p:cNvSpPr/>
+          <p:nvPr/>
+        </p:nvSpPr>
+        <p:spPr>
+          <a:xfrm>
+            <a:off x="274320" y="822960"/>
+            <a:ext cx="8595360" cy="5303520"/>
+          </a:xfrm>
+          <a:prstGeom prst="roundRect">
+            <a:avLst/>
+          </a:prstGeom>
+          <a:solidFill>
+            <a:srgbClr val="1E1E1E"/>
+          </a:solidFill>
+          <a:ln>
+            <a:noFill/>
+          </a:ln>
+        </p:spPr>
+        <p:style>
+          <a:lnRef idx="1">
+            <a:schemeClr val="accent1"/>
+          </a:lnRef>
+          <a:fillRef idx="3">
+            <a:schemeClr val="accent1"/>
+          </a:fillRef>
+          <a:effectRef idx="2">
+            <a:schemeClr val="accent1"/>
+          </a:effectRef>
+          <a:fontRef idx="minor">
+            <a:schemeClr val="lt1"/>
+          </a:fontRef>
+        </p:style>
+        <p:txBody>
+          <a:bodyPr rtlCol="0" anchor="ctr"/>
+          <a:lstStyle/>
+          <a:p>
+            <a:pPr algn="ctr"/>
+          </a:p>
+        </p:txBody>
+      </p:sp>
+      <p:sp>
+        <p:nvSpPr>
+          <p:cNvPr id="4" name="TextBox 3"/>
           <p:cNvSpPr txBox="1"/>
           <p:nvPr/>
         </p:nvSpPr>
         <p:spPr>
           <a:xfrm>
-            <a:off x="640080" y="1188720"/>
-            <a:ext cx="7772400" cy="5029200"/>
+            <a:off x="457200" y="1005840"/>
+            <a:ext cx="8229600" cy="4937760"/>
           </a:xfrm>
           <a:prstGeom prst="rect">
             <a:avLst/>
@@ -3251,92 +3295,74 @@
           <a:lstStyle/>
           <a:p>
             <a:pPr>
-              <a:spcAft>
-                <a:spcPts val="1200"/>
-              </a:spcAft>
-              <a:defRPr sz="2000">
-                <a:solidFill>
-                  <a:srgbClr val="333333"/>
-                </a:solidFill>
-              </a:defRPr>
-            </a:pPr>
-            <a:r>
-              <a:t>• 01_math_rl_arithmetic.ipynb - Basic RL training</a:t>
-            </a:r>
-          </a:p>
-          <a:p>
-            <a:pPr>
-              <a:spcAft>
-                <a:spcPts val="1200"/>
-              </a:spcAft>
-              <a:defRPr sz="2000">
-                <a:solidFill>
-                  <a:srgbClr val="333333"/>
-                </a:solidFill>
-              </a:defRPr>
-            </a:pPr>
-            <a:r>
-              <a:t>• 02_chat_sl_sft.ipynb - Supervised fine-tuning</a:t>
-            </a:r>
-          </a:p>
-          <a:p>
-            <a:pPr>
-              <a:spcAft>
-                <a:spcPts val="1200"/>
-              </a:spcAft>
-              <a:defRPr sz="2000">
-                <a:solidFill>
-                  <a:srgbClr val="333333"/>
-                </a:solidFill>
-              </a:defRPr>
-            </a:pPr>
-            <a:r>
-              <a:t>• 03_preference_shorter.ipynb - Preference learning</a:t>
-            </a:r>
-          </a:p>
-          <a:p>
-            <a:pPr>
-              <a:spcAft>
-                <a:spcPts val="1200"/>
-              </a:spcAft>
-              <a:defRPr sz="2000">
-                <a:solidFill>
-                  <a:srgbClr val="333333"/>
-                </a:solidFill>
-              </a:defRPr>
-            </a:pPr>
-            <a:r>
-              <a:t>• 04_distillation_off_policy.ipynb - SFT distillation</a:t>
-            </a:r>
-          </a:p>
-          <a:p>
-            <a:pPr>
-              <a:spcAft>
-                <a:spcPts val="1200"/>
-              </a:spcAft>
-              <a:defRPr sz="2000">
-                <a:solidFill>
-                  <a:srgbClr val="333333"/>
-                </a:solidFill>
-              </a:defRPr>
-            </a:pPr>
-            <a:r>
-              <a:t>• 05_distillation_on_policy.ipynb - KL distillation</a:t>
-            </a:r>
-          </a:p>
-          <a:p>
-            <a:pPr>
-              <a:spcAft>
-                <a:spcPts val="1200"/>
-              </a:spcAft>
-              <a:defRPr sz="2000">
-                <a:solidFill>
-                  <a:srgbClr val="333333"/>
-                </a:solidFill>
-              </a:defRPr>
-            </a:pPr>
-            <a:r>
-              <a:t>• 06_math_rl_gsm8k.ipynb - Word problem solving</a:t>
+              <a:defRPr sz="1200">
+                <a:solidFill>
+                  <a:srgbClr val="00FF00"/>
+                </a:solidFill>
+                <a:latin typeface="Courier New"/>
+              </a:defRPr>
+            </a:pPr>
+            <a:r>
+              <a:t># Install Tinker</a:t>
+            </a:r>
+            <a:br/>
+            <a:r>
+              <a:t>pip install tinker tinker-cookbook</a:t>
+            </a:r>
+            <a:br/>
+            <a:br/>
+            <a:r>
+              <a:t># Set API key</a:t>
+            </a:r>
+            <a:br/>
+            <a:r>
+              <a:t>export TINKER_API_KEY="your-key-here"</a:t>
+            </a:r>
+            <a:br/>
+            <a:br/>
+            <a:r>
+              <a:t># Run RL training</a:t>
+            </a:r>
+            <a:br/>
+            <a:r>
+              <a:t>python -m tinker_cookbook.recipes.math_rl.train \</a:t>
+            </a:r>
+            <a:br/>
+            <a:r>
+              <a:t>    model_name="meta-llama/Llama-3.2-1B" \</a:t>
+            </a:r>
+            <a:br/>
+            <a:r>
+              <a:t>    env=arithmetic \</a:t>
+            </a:r>
+            <a:br/>
+            <a:r>
+              <a:t>    group_size=4 \</a:t>
+            </a:r>
+            <a:br/>
+            <a:r>
+              <a:t>    groups_per_batch=100 \</a:t>
+            </a:r>
+            <a:br/>
+            <a:r>
+              <a:t>    learning_rate=1e-4</a:t>
+            </a:r>
+            <a:br/>
+            <a:br/>
+            <a:r>
+              <a:t># Output:</a:t>
+            </a:r>
+            <a:br/>
+            <a:r>
+              <a:t># Step 0:  reward=0.676, correct=69.5%</a:t>
+            </a:r>
+            <a:br/>
+            <a:r>
+              <a:t># Step 10: reward=0.998, correct=99.8%</a:t>
+            </a:r>
+            <a:br/>
+            <a:r>
+              <a:t># Step 20: reward=1.000, correct=100%</a:t>
             </a:r>
           </a:p>
         </p:txBody>
@@ -3389,7 +3415,7 @@
               </a:defRPr>
             </a:pPr>
             <a:r>
-              <a:t>Key Findings</a:t>
+              <a:t>Jupyter Notebooks Created</a:t>
             </a:r>
           </a:p>
         </p:txBody>
@@ -3427,7 +3453,7 @@
               </a:defRPr>
             </a:pPr>
             <a:r>
-              <a:t>• Simple tasks (arithmetic): RL achieves 100% quickly</a:t>
+              <a:t>• 01_math_rl_arithmetic.ipynb - Basic RL for addition</a:t>
             </a:r>
           </a:p>
           <a:p>
@@ -3442,7 +3468,7 @@
               </a:defRPr>
             </a:pPr>
             <a:r>
-              <a:t>• Complex tasks (GSM8K): Requires more training, larger models</a:t>
+              <a:t>• 02_chat_sl_sft.ipynb - Supervised fine-tuning</a:t>
             </a:r>
           </a:p>
           <a:p>
@@ -3457,7 +3483,7 @@
               </a:defRPr>
             </a:pPr>
             <a:r>
-              <a:t>• Preference learning: Effective for stylistic control</a:t>
+              <a:t>• 03_preference_shorter.ipynb - Pairwise preference learning</a:t>
             </a:r>
           </a:p>
           <a:p>
@@ -3472,7 +3498,7 @@
               </a:defRPr>
             </a:pPr>
             <a:r>
-              <a:t>• Distillation: Efficient transfer from teacher models</a:t>
+              <a:t>• 04_distillation_off_policy.ipynb - SFT distillation</a:t>
             </a:r>
           </a:p>
           <a:p>
@@ -3487,7 +3513,22 @@
               </a:defRPr>
             </a:pPr>
             <a:r>
-              <a:t>• Cloud training: Accessible without local GPU resources</a:t>
+              <a:t>• 05_distillation_on_policy.ipynb - KL distillation</a:t>
+            </a:r>
+          </a:p>
+          <a:p>
+            <a:pPr>
+              <a:spcAft>
+                <a:spcPts val="1200"/>
+              </a:spcAft>
+              <a:defRPr sz="2000">
+                <a:solidFill>
+                  <a:srgbClr val="333333"/>
+                </a:solidFill>
+              </a:defRPr>
+            </a:pPr>
+            <a:r>
+              <a:t>• 06_math_rl_gsm8k.ipynb - Word problem solving</a:t>
             </a:r>
           </a:p>
         </p:txBody>
@@ -3540,7 +3581,7 @@
               </a:defRPr>
             </a:pPr>
             <a:r>
-              <a:t>Future Directions</a:t>
+              <a:t>Key Findings</a:t>
             </a:r>
           </a:p>
         </p:txBody>
@@ -3578,7 +3619,7 @@
               </a:defRPr>
             </a:pPr>
             <a:r>
-              <a:t>• Code generation with sandbox execution (DeepCoder)</a:t>
+              <a:t>• Simple tasks (arithmetic): RL achieves 100% in ~20 steps</a:t>
             </a:r>
           </a:p>
           <a:p>
@@ -3593,7 +3634,7 @@
               </a:defRPr>
             </a:pPr>
             <a:r>
-              <a:t>• Multi-agent RL training (games, debates)</a:t>
+              <a:t>• Complex tasks (GSM8K): Requires more training, larger models</a:t>
             </a:r>
           </a:p>
           <a:p>
@@ -3608,7 +3649,7 @@
               </a:defRPr>
             </a:pPr>
             <a:r>
-              <a:t>• RLHF with human preference data</a:t>
+              <a:t>• Preference learning: Effective for stylistic control</a:t>
             </a:r>
           </a:p>
           <a:p>
@@ -3623,7 +3664,7 @@
               </a:defRPr>
             </a:pPr>
             <a:r>
-              <a:t>• Scaling to larger models (8B, 32B parameters)</a:t>
+              <a:t>• Distillation: Efficient knowledge transfer</a:t>
             </a:r>
           </a:p>
           <a:p>
@@ -3638,7 +3679,7 @@
               </a:defRPr>
             </a:pPr>
             <a:r>
-              <a:t>• Custom reward functions for domain-specific tasks</a:t>
+              <a:t>• Cloud training: Accessible without local GPUs</a:t>
             </a:r>
           </a:p>
         </p:txBody>
@@ -3669,8 +3710,8 @@
         </p:nvSpPr>
         <p:spPr>
           <a:xfrm>
-            <a:off x="457200" y="2286000"/>
-            <a:ext cx="8229600" cy="1371600"/>
+            <a:off x="457200" y="274320"/>
+            <a:ext cx="8229600" cy="914400"/>
           </a:xfrm>
           <a:prstGeom prst="rect">
             <a:avLst/>
@@ -3683,15 +3724,15 @@
           </a:bodyPr>
           <a:lstStyle/>
           <a:p>
-            <a:pPr algn="ctr">
-              <a:defRPr sz="4400" b="1">
+            <a:pPr>
+              <a:defRPr sz="3200" b="1">
                 <a:solidFill>
                   <a:srgbClr val="1A1A2E"/>
                 </a:solidFill>
               </a:defRPr>
             </a:pPr>
             <a:r>
-              <a:t>Thank You!</a:t>
+              <a:t>Future Directions</a:t>
             </a:r>
           </a:p>
         </p:txBody>
@@ -3704,8 +3745,124 @@
         </p:nvSpPr>
         <p:spPr>
           <a:xfrm>
-            <a:off x="457200" y="3657600"/>
-            <a:ext cx="8229600" cy="914400"/>
+            <a:off x="640080" y="1188720"/>
+            <a:ext cx="7772400" cy="5029200"/>
+          </a:xfrm>
+          <a:prstGeom prst="rect">
+            <a:avLst/>
+          </a:prstGeom>
+          <a:noFill/>
+        </p:spPr>
+        <p:txBody>
+          <a:bodyPr wrap="square">
+            <a:spAutoFit/>
+          </a:bodyPr>
+          <a:lstStyle/>
+          <a:p>
+            <a:pPr>
+              <a:spcAft>
+                <a:spcPts val="1200"/>
+              </a:spcAft>
+              <a:defRPr sz="2000">
+                <a:solidFill>
+                  <a:srgbClr val="333333"/>
+                </a:solidFill>
+              </a:defRPr>
+            </a:pPr>
+            <a:r>
+              <a:t>• Code generation with sandbox (DeepCoder)</a:t>
+            </a:r>
+          </a:p>
+          <a:p>
+            <a:pPr>
+              <a:spcAft>
+                <a:spcPts val="1200"/>
+              </a:spcAft>
+              <a:defRPr sz="2000">
+                <a:solidFill>
+                  <a:srgbClr val="333333"/>
+                </a:solidFill>
+              </a:defRPr>
+            </a:pPr>
+            <a:r>
+              <a:t>• Multi-agent RL training</a:t>
+            </a:r>
+          </a:p>
+          <a:p>
+            <a:pPr>
+              <a:spcAft>
+                <a:spcPts val="1200"/>
+              </a:spcAft>
+              <a:defRPr sz="2000">
+                <a:solidFill>
+                  <a:srgbClr val="333333"/>
+                </a:solidFill>
+              </a:defRPr>
+            </a:pPr>
+            <a:r>
+              <a:t>• RLHF with human preference data</a:t>
+            </a:r>
+          </a:p>
+          <a:p>
+            <a:pPr>
+              <a:spcAft>
+                <a:spcPts val="1200"/>
+              </a:spcAft>
+              <a:defRPr sz="2000">
+                <a:solidFill>
+                  <a:srgbClr val="333333"/>
+                </a:solidFill>
+              </a:defRPr>
+            </a:pPr>
+            <a:r>
+              <a:t>• Scaling to larger models (8B, 32B)</a:t>
+            </a:r>
+          </a:p>
+          <a:p>
+            <a:pPr>
+              <a:spcAft>
+                <a:spcPts val="1200"/>
+              </a:spcAft>
+              <a:defRPr sz="2000">
+                <a:solidFill>
+                  <a:srgbClr val="333333"/>
+                </a:solidFill>
+              </a:defRPr>
+            </a:pPr>
+            <a:r>
+              <a:t>• Custom reward functions</a:t>
+            </a:r>
+          </a:p>
+        </p:txBody>
+      </p:sp>
+    </p:spTree>
+  </p:cSld>
+  <p:clrMapOvr>
+    <a:masterClrMapping/>
+  </p:clrMapOvr>
+</p:sld>
+</file>
+
+<file path=ppt/slides/slide14.xml><?xml version="1.0" encoding="utf-8"?>
+<p:sld xmlns:a="http://schemas.openxmlformats.org/drawingml/2006/main" xmlns:p="http://schemas.openxmlformats.org/presentationml/2006/main" xmlns:r="http://schemas.openxmlformats.org/officeDocument/2006/relationships">
+  <p:cSld>
+    <p:spTree>
+      <p:nvGrpSpPr>
+        <p:cNvPr id="1" name=""/>
+        <p:cNvGrpSpPr/>
+        <p:nvPr/>
+      </p:nvGrpSpPr>
+      <p:grpSpPr/>
+      <p:sp>
+        <p:nvSpPr>
+          <p:cNvPr id="2" name="TextBox 1"/>
+          <p:cNvSpPr txBox="1"/>
+          <p:nvPr/>
+        </p:nvSpPr>
+        <p:spPr>
+          <a:xfrm>
+            <a:off x="457200" y="2286000"/>
+            <a:ext cx="8229600" cy="1371600"/>
           </a:xfrm>
           <a:prstGeom prst="rect">
             <a:avLst/>
@@ -3719,6 +3876,41 @@
           <a:lstStyle/>
           <a:p>
             <a:pPr algn="ctr">
+              <a:defRPr sz="4400" b="1">
+                <a:solidFill>
+                  <a:srgbClr val="1A1A2E"/>
+                </a:solidFill>
+              </a:defRPr>
+            </a:pPr>
+            <a:r>
+              <a:t>Thank You!</a:t>
+            </a:r>
+          </a:p>
+        </p:txBody>
+      </p:sp>
+      <p:sp>
+        <p:nvSpPr>
+          <p:cNvPr id="3" name="TextBox 2"/>
+          <p:cNvSpPr txBox="1"/>
+          <p:nvPr/>
+        </p:nvSpPr>
+        <p:spPr>
+          <a:xfrm>
+            <a:off x="457200" y="3657600"/>
+            <a:ext cx="8229600" cy="1097280"/>
+          </a:xfrm>
+          <a:prstGeom prst="rect">
+            <a:avLst/>
+          </a:prstGeom>
+          <a:noFill/>
+        </p:spPr>
+        <p:txBody>
+          <a:bodyPr wrap="none">
+            <a:spAutoFit/>
+          </a:bodyPr>
+          <a:lstStyle/>
+          <a:p>
+            <a:pPr algn="ctr">
               <a:defRPr sz="2400">
                 <a:solidFill>
                   <a:srgbClr val="666666"/>
@@ -3731,11 +3923,7 @@
             <a:br/>
             <a:br/>
             <a:r>
-              <a:t>PES LLM Research Project</a:t>
-            </a:r>
-            <a:br/>
-            <a:r>
-              <a:t>Tinker Cookbook Experiments</a:t>
+              <a:t>pes-llm-research/tinker-experiments</a:t>
             </a:r>
           </a:p>
         </p:txBody>
@@ -3856,7 +4044,7 @@
               </a:defRPr>
             </a:pPr>
             <a:r>
-              <a:t>• Provides pre-built recipes: Math RL, Preference Learning, Distillation</a:t>
+              <a:t>• Pre-built recipes: Math RL, Preference, Distillation</a:t>
             </a:r>
           </a:p>
           <a:p>
@@ -3886,7 +4074,7 @@
               </a:defRPr>
             </a:pPr>
             <a:r>
-              <a:t>• API-based access with Python SDK</a:t>
+              <a:t>• Python SDK with simple API</a:t>
             </a:r>
           </a:p>
         </p:txBody>
@@ -3917,8 +4105,8 @@
         </p:nvSpPr>
         <p:spPr>
           <a:xfrm>
-            <a:off x="457200" y="274320"/>
-            <a:ext cx="8229600" cy="914400"/>
+            <a:off x="457200" y="137160"/>
+            <a:ext cx="8229600" cy="640080"/>
           </a:xfrm>
           <a:prstGeom prst="rect">
             <a:avLst/>
@@ -3932,28 +4120,185 @@
           <a:lstStyle/>
           <a:p>
             <a:pPr>
-              <a:defRPr sz="3200" b="1">
+              <a:defRPr sz="2800" b="1">
                 <a:solidFill>
                   <a:srgbClr val="1A1A2E"/>
                 </a:solidFill>
               </a:defRPr>
             </a:pPr>
             <a:r>
-              <a:t>Training Methods Explored</a:t>
-            </a:r>
-          </a:p>
-        </p:txBody>
-      </p:sp>
-      <p:sp>
-        <p:nvSpPr>
-          <p:cNvPr id="3" name="TextBox 2"/>
+              <a:t>How Tinker Works: Cloud Architecture</a:t>
+            </a:r>
+          </a:p>
+        </p:txBody>
+      </p:sp>
+      <p:sp>
+        <p:nvSpPr>
+          <p:cNvPr id="3" name="Rounded Rectangle 2"/>
+          <p:cNvSpPr/>
+          <p:nvPr/>
+        </p:nvSpPr>
+        <p:spPr>
+          <a:xfrm>
+            <a:off x="274320" y="1371600"/>
+            <a:ext cx="2011680" cy="1188720"/>
+          </a:xfrm>
+          <a:prstGeom prst="roundRect">
+            <a:avLst/>
+          </a:prstGeom>
+          <a:solidFill>
+            <a:srgbClr val="F0F0F0"/>
+          </a:solidFill>
+          <a:ln w="19050">
+            <a:solidFill>
+              <a:srgbClr val="333333"/>
+            </a:solidFill>
+          </a:ln>
+        </p:spPr>
+        <p:style>
+          <a:lnRef idx="1">
+            <a:schemeClr val="accent1"/>
+          </a:lnRef>
+          <a:fillRef idx="3">
+            <a:schemeClr val="accent1"/>
+          </a:fillRef>
+          <a:effectRef idx="2">
+            <a:schemeClr val="accent1"/>
+          </a:effectRef>
+          <a:fontRef idx="minor">
+            <a:schemeClr val="lt1"/>
+          </a:fontRef>
+        </p:style>
+        <p:txBody>
+          <a:bodyPr rtlCol="0" anchor="ctr" wrap="square"/>
+          <a:lstStyle/>
+          <a:p>
+            <a:pPr algn="ctr">
+              <a:defRPr sz="1300" b="1">
+                <a:solidFill>
+                  <a:srgbClr val="1A1A2E"/>
+                </a:solidFill>
+              </a:defRPr>
+            </a:pPr>
+            <a:r>
+              <a:t>Your Code</a:t>
+            </a:r>
+            <a:br/>
+            <a:r>
+              <a:t>(Python SDK)</a:t>
+            </a:r>
+          </a:p>
+        </p:txBody>
+      </p:sp>
+      <p:sp>
+        <p:nvSpPr>
+          <p:cNvPr id="4" name="Rounded Rectangle 3"/>
+          <p:cNvSpPr/>
+          <p:nvPr/>
+        </p:nvSpPr>
+        <p:spPr>
+          <a:xfrm>
+            <a:off x="274320" y="2926080"/>
+            <a:ext cx="2011680" cy="731520"/>
+          </a:xfrm>
+          <a:prstGeom prst="roundRect">
+            <a:avLst/>
+          </a:prstGeom>
+          <a:solidFill>
+            <a:srgbClr val="FF8C00"/>
+          </a:solidFill>
+          <a:ln w="19050">
+            <a:solidFill>
+              <a:srgbClr val="333333"/>
+            </a:solidFill>
+          </a:ln>
+        </p:spPr>
+        <p:style>
+          <a:lnRef idx="1">
+            <a:schemeClr val="accent1"/>
+          </a:lnRef>
+          <a:fillRef idx="3">
+            <a:schemeClr val="accent1"/>
+          </a:fillRef>
+          <a:effectRef idx="2">
+            <a:schemeClr val="accent1"/>
+          </a:effectRef>
+          <a:fontRef idx="minor">
+            <a:schemeClr val="lt1"/>
+          </a:fontRef>
+        </p:style>
+        <p:txBody>
+          <a:bodyPr rtlCol="0" anchor="ctr" wrap="square"/>
+          <a:lstStyle/>
+          <a:p>
+            <a:pPr algn="ctr">
+              <a:defRPr sz="1200" b="1">
+                <a:solidFill>
+                  <a:srgbClr val="FFFFFF"/>
+                </a:solidFill>
+              </a:defRPr>
+            </a:pPr>
+            <a:r>
+              <a:t>API Key</a:t>
+            </a:r>
+          </a:p>
+        </p:txBody>
+      </p:sp>
+      <p:sp>
+        <p:nvSpPr>
+          <p:cNvPr id="5" name="Rounded Rectangle 4"/>
+          <p:cNvSpPr/>
+          <p:nvPr/>
+        </p:nvSpPr>
+        <p:spPr>
+          <a:xfrm>
+            <a:off x="2926080" y="1097280"/>
+            <a:ext cx="5943600" cy="4572000"/>
+          </a:xfrm>
+          <a:prstGeom prst="roundRect">
+            <a:avLst/>
+          </a:prstGeom>
+          <a:solidFill>
+            <a:srgbClr val="E8F4FC"/>
+          </a:solidFill>
+          <a:ln w="25400">
+            <a:solidFill>
+              <a:srgbClr val="4169E1"/>
+            </a:solidFill>
+          </a:ln>
+        </p:spPr>
+        <p:style>
+          <a:lnRef idx="1">
+            <a:schemeClr val="accent1"/>
+          </a:lnRef>
+          <a:fillRef idx="3">
+            <a:schemeClr val="accent1"/>
+          </a:fillRef>
+          <a:effectRef idx="2">
+            <a:schemeClr val="accent1"/>
+          </a:effectRef>
+          <a:fontRef idx="minor">
+            <a:schemeClr val="lt1"/>
+          </a:fontRef>
+        </p:style>
+        <p:txBody>
+          <a:bodyPr rtlCol="0" anchor="ctr"/>
+          <a:lstStyle/>
+          <a:p>
+            <a:pPr algn="ctr"/>
+          </a:p>
+        </p:txBody>
+      </p:sp>
+      <p:sp>
+        <p:nvSpPr>
+          <p:cNvPr id="6" name="TextBox 5"/>
           <p:cNvSpPr txBox="1"/>
           <p:nvPr/>
         </p:nvSpPr>
         <p:spPr>
           <a:xfrm>
-            <a:off x="640080" y="1188720"/>
-            <a:ext cx="7772400" cy="5029200"/>
+            <a:off x="5029200" y="1188720"/>
+            <a:ext cx="1828800" cy="365760"/>
           </a:xfrm>
           <a:prstGeom prst="rect">
             <a:avLst/>
@@ -3961,83 +4306,735 @@
           <a:noFill/>
         </p:spPr>
         <p:txBody>
-          <a:bodyPr wrap="square">
+          <a:bodyPr wrap="none">
             <a:spAutoFit/>
           </a:bodyPr>
           <a:lstStyle/>
           <a:p>
             <a:pPr>
-              <a:spcAft>
-                <a:spcPts val="1200"/>
-              </a:spcAft>
-              <a:defRPr sz="2000">
-                <a:solidFill>
-                  <a:srgbClr val="333333"/>
-                </a:solidFill>
-              </a:defRPr>
-            </a:pPr>
-            <a:r>
-              <a:t>• Supervised Fine-Tuning (SFT): Train on human-written examples</a:t>
-            </a:r>
-          </a:p>
+              <a:defRPr sz="1400" b="1">
+                <a:solidFill>
+                  <a:srgbClr val="4169E1"/>
+                </a:solidFill>
+              </a:defRPr>
+            </a:pPr>
+            <a:r>
+              <a:t>☁️ Tinker Cloud</a:t>
+            </a:r>
+          </a:p>
+        </p:txBody>
+      </p:sp>
+      <p:sp>
+        <p:nvSpPr>
+          <p:cNvPr id="7" name="Rounded Rectangle 6"/>
+          <p:cNvSpPr/>
+          <p:nvPr/>
+        </p:nvSpPr>
+        <p:spPr>
+          <a:xfrm>
+            <a:off x="3200400" y="1828800"/>
+            <a:ext cx="1828800" cy="914400"/>
+          </a:xfrm>
+          <a:prstGeom prst="roundRect">
+            <a:avLst/>
+          </a:prstGeom>
+          <a:solidFill>
+            <a:srgbClr val="4169E1"/>
+          </a:solidFill>
+          <a:ln w="19050">
+            <a:solidFill>
+              <a:srgbClr val="333333"/>
+            </a:solidFill>
+          </a:ln>
+        </p:spPr>
+        <p:style>
+          <a:lnRef idx="1">
+            <a:schemeClr val="accent1"/>
+          </a:lnRef>
+          <a:fillRef idx="3">
+            <a:schemeClr val="accent1"/>
+          </a:fillRef>
+          <a:effectRef idx="2">
+            <a:schemeClr val="accent1"/>
+          </a:effectRef>
+          <a:fontRef idx="minor">
+            <a:schemeClr val="lt1"/>
+          </a:fontRef>
+        </p:style>
+        <p:txBody>
+          <a:bodyPr rtlCol="0" anchor="ctr" wrap="square"/>
+          <a:lstStyle/>
+          <a:p>
+            <a:pPr algn="ctr">
+              <a:defRPr sz="1200" b="1">
+                <a:solidFill>
+                  <a:srgbClr val="FFFFFF"/>
+                </a:solidFill>
+              </a:defRPr>
+            </a:pPr>
+            <a:r>
+              <a:t>API Gateway</a:t>
+            </a:r>
+            <a:br/>
+            <a:r>
+              <a:t>&amp; Auth</a:t>
+            </a:r>
+          </a:p>
+        </p:txBody>
+      </p:sp>
+      <p:sp>
+        <p:nvSpPr>
+          <p:cNvPr id="8" name="Rounded Rectangle 7"/>
+          <p:cNvSpPr/>
+          <p:nvPr/>
+        </p:nvSpPr>
+        <p:spPr>
+          <a:xfrm>
+            <a:off x="5486400" y="1828800"/>
+            <a:ext cx="1828800" cy="914400"/>
+          </a:xfrm>
+          <a:prstGeom prst="roundRect">
+            <a:avLst/>
+          </a:prstGeom>
+          <a:solidFill>
+            <a:srgbClr val="6F42C1"/>
+          </a:solidFill>
+          <a:ln w="19050">
+            <a:solidFill>
+              <a:srgbClr val="333333"/>
+            </a:solidFill>
+          </a:ln>
+        </p:spPr>
+        <p:style>
+          <a:lnRef idx="1">
+            <a:schemeClr val="accent1"/>
+          </a:lnRef>
+          <a:fillRef idx="3">
+            <a:schemeClr val="accent1"/>
+          </a:fillRef>
+          <a:effectRef idx="2">
+            <a:schemeClr val="accent1"/>
+          </a:effectRef>
+          <a:fontRef idx="minor">
+            <a:schemeClr val="lt1"/>
+          </a:fontRef>
+        </p:style>
+        <p:txBody>
+          <a:bodyPr rtlCol="0" anchor="ctr" wrap="square"/>
+          <a:lstStyle/>
+          <a:p>
+            <a:pPr algn="ctr">
+              <a:defRPr sz="1200" b="1">
+                <a:solidFill>
+                  <a:srgbClr val="FFFFFF"/>
+                </a:solidFill>
+              </a:defRPr>
+            </a:pPr>
+            <a:r>
+              <a:t>Model</a:t>
+            </a:r>
+            <a:br/>
+            <a:r>
+              <a:t>Registry</a:t>
+            </a:r>
+          </a:p>
+        </p:txBody>
+      </p:sp>
+      <p:sp>
+        <p:nvSpPr>
+          <p:cNvPr id="9" name="Rounded Rectangle 8"/>
+          <p:cNvSpPr/>
+          <p:nvPr/>
+        </p:nvSpPr>
+        <p:spPr>
+          <a:xfrm>
+            <a:off x="3200400" y="3200400"/>
+            <a:ext cx="1828800" cy="1097280"/>
+          </a:xfrm>
+          <a:prstGeom prst="roundRect">
+            <a:avLst/>
+          </a:prstGeom>
+          <a:solidFill>
+            <a:srgbClr val="28A745"/>
+          </a:solidFill>
+          <a:ln w="19050">
+            <a:solidFill>
+              <a:srgbClr val="333333"/>
+            </a:solidFill>
+          </a:ln>
+        </p:spPr>
+        <p:style>
+          <a:lnRef idx="1">
+            <a:schemeClr val="accent1"/>
+          </a:lnRef>
+          <a:fillRef idx="3">
+            <a:schemeClr val="accent1"/>
+          </a:fillRef>
+          <a:effectRef idx="2">
+            <a:schemeClr val="accent1"/>
+          </a:effectRef>
+          <a:fontRef idx="minor">
+            <a:schemeClr val="lt1"/>
+          </a:fontRef>
+        </p:style>
+        <p:txBody>
+          <a:bodyPr rtlCol="0" anchor="ctr" wrap="square"/>
+          <a:lstStyle/>
+          <a:p>
+            <a:pPr algn="ctr">
+              <a:defRPr sz="1200" b="1">
+                <a:solidFill>
+                  <a:srgbClr val="FFFFFF"/>
+                </a:solidFill>
+              </a:defRPr>
+            </a:pPr>
+            <a:r>
+              <a:t>Training</a:t>
+            </a:r>
+            <a:br/>
+            <a:r>
+              <a:t>Orchestrator</a:t>
+            </a:r>
+          </a:p>
+        </p:txBody>
+      </p:sp>
+      <p:sp>
+        <p:nvSpPr>
+          <p:cNvPr id="10" name="Rounded Rectangle 9"/>
+          <p:cNvSpPr/>
+          <p:nvPr/>
+        </p:nvSpPr>
+        <p:spPr>
+          <a:xfrm>
+            <a:off x="5486400" y="3200400"/>
+            <a:ext cx="1828800" cy="1097280"/>
+          </a:xfrm>
+          <a:prstGeom prst="roundRect">
+            <a:avLst/>
+          </a:prstGeom>
+          <a:solidFill>
+            <a:srgbClr val="FF8C00"/>
+          </a:solidFill>
+          <a:ln w="19050">
+            <a:solidFill>
+              <a:srgbClr val="333333"/>
+            </a:solidFill>
+          </a:ln>
+        </p:spPr>
+        <p:style>
+          <a:lnRef idx="1">
+            <a:schemeClr val="accent1"/>
+          </a:lnRef>
+          <a:fillRef idx="3">
+            <a:schemeClr val="accent1"/>
+          </a:fillRef>
+          <a:effectRef idx="2">
+            <a:schemeClr val="accent1"/>
+          </a:effectRef>
+          <a:fontRef idx="minor">
+            <a:schemeClr val="lt1"/>
+          </a:fontRef>
+        </p:style>
+        <p:txBody>
+          <a:bodyPr rtlCol="0" anchor="ctr" wrap="square"/>
+          <a:lstStyle/>
+          <a:p>
+            <a:pPr algn="ctr">
+              <a:defRPr sz="1200" b="1">
+                <a:solidFill>
+                  <a:srgbClr val="FFFFFF"/>
+                </a:solidFill>
+              </a:defRPr>
+            </a:pPr>
+            <a:r>
+              <a:t>GPU</a:t>
+            </a:r>
+            <a:br/>
+            <a:r>
+              <a:t>Cluster</a:t>
+            </a:r>
+          </a:p>
+        </p:txBody>
+      </p:sp>
+      <p:sp>
+        <p:nvSpPr>
+          <p:cNvPr id="11" name="Rounded Rectangle 10"/>
+          <p:cNvSpPr/>
+          <p:nvPr/>
+        </p:nvSpPr>
+        <p:spPr>
+          <a:xfrm>
+            <a:off x="4343400" y="4754880"/>
+            <a:ext cx="2286000" cy="822960"/>
+          </a:xfrm>
+          <a:prstGeom prst="roundRect">
+            <a:avLst/>
+          </a:prstGeom>
+          <a:solidFill>
+            <a:srgbClr val="666666"/>
+          </a:solidFill>
+          <a:ln w="19050">
+            <a:solidFill>
+              <a:srgbClr val="333333"/>
+            </a:solidFill>
+          </a:ln>
+        </p:spPr>
+        <p:style>
+          <a:lnRef idx="1">
+            <a:schemeClr val="accent1"/>
+          </a:lnRef>
+          <a:fillRef idx="3">
+            <a:schemeClr val="accent1"/>
+          </a:fillRef>
+          <a:effectRef idx="2">
+            <a:schemeClr val="accent1"/>
+          </a:effectRef>
+          <a:fontRef idx="minor">
+            <a:schemeClr val="lt1"/>
+          </a:fontRef>
+        </p:style>
+        <p:txBody>
+          <a:bodyPr rtlCol="0" anchor="ctr" wrap="square"/>
+          <a:lstStyle/>
+          <a:p>
+            <a:pPr algn="ctr">
+              <a:defRPr sz="1200" b="1">
+                <a:solidFill>
+                  <a:srgbClr val="FFFFFF"/>
+                </a:solidFill>
+              </a:defRPr>
+            </a:pPr>
+            <a:r>
+              <a:t>Checkpoint</a:t>
+            </a:r>
+            <a:br/>
+            <a:r>
+              <a:t>Storage</a:t>
+            </a:r>
+          </a:p>
+        </p:txBody>
+      </p:sp>
+      <p:sp>
+        <p:nvSpPr>
+          <p:cNvPr id="12" name="Right Arrow 11"/>
+          <p:cNvSpPr/>
+          <p:nvPr/>
+        </p:nvSpPr>
+        <p:spPr>
+          <a:xfrm>
+            <a:off x="2286000" y="1828800"/>
+            <a:ext cx="822960" cy="228600"/>
+          </a:xfrm>
+          <a:prstGeom prst="rightArrow">
+            <a:avLst/>
+          </a:prstGeom>
+          <a:solidFill>
+            <a:srgbClr val="666666"/>
+          </a:solidFill>
+          <a:ln>
+            <a:noFill/>
+          </a:ln>
+        </p:spPr>
+        <p:style>
+          <a:lnRef idx="1">
+            <a:schemeClr val="accent1"/>
+          </a:lnRef>
+          <a:fillRef idx="3">
+            <a:schemeClr val="accent1"/>
+          </a:fillRef>
+          <a:effectRef idx="2">
+            <a:schemeClr val="accent1"/>
+          </a:effectRef>
+          <a:fontRef idx="minor">
+            <a:schemeClr val="lt1"/>
+          </a:fontRef>
+        </p:style>
+        <p:txBody>
+          <a:bodyPr rtlCol="0" anchor="ctr"/>
+          <a:lstStyle/>
+          <a:p>
+            <a:pPr algn="ctr"/>
+          </a:p>
+        </p:txBody>
+      </p:sp>
+      <p:sp>
+        <p:nvSpPr>
+          <p:cNvPr id="13" name="Right Arrow 12"/>
+          <p:cNvSpPr/>
+          <p:nvPr/>
+        </p:nvSpPr>
+        <p:spPr>
+          <a:xfrm>
+            <a:off x="5029200" y="2148840"/>
+            <a:ext cx="365760" cy="228600"/>
+          </a:xfrm>
+          <a:prstGeom prst="rightArrow">
+            <a:avLst/>
+          </a:prstGeom>
+          <a:solidFill>
+            <a:srgbClr val="666666"/>
+          </a:solidFill>
+          <a:ln>
+            <a:noFill/>
+          </a:ln>
+        </p:spPr>
+        <p:style>
+          <a:lnRef idx="1">
+            <a:schemeClr val="accent1"/>
+          </a:lnRef>
+          <a:fillRef idx="3">
+            <a:schemeClr val="accent1"/>
+          </a:fillRef>
+          <a:effectRef idx="2">
+            <a:schemeClr val="accent1"/>
+          </a:effectRef>
+          <a:fontRef idx="minor">
+            <a:schemeClr val="lt1"/>
+          </a:fontRef>
+        </p:style>
+        <p:txBody>
+          <a:bodyPr rtlCol="0" anchor="ctr"/>
+          <a:lstStyle/>
+          <a:p>
+            <a:pPr algn="ctr"/>
+          </a:p>
+        </p:txBody>
+      </p:sp>
+      <p:sp>
+        <p:nvSpPr>
+          <p:cNvPr id="14" name="Down Arrow 13"/>
+          <p:cNvSpPr/>
+          <p:nvPr/>
+        </p:nvSpPr>
+        <p:spPr>
+          <a:xfrm>
+            <a:off x="3977639" y="2788920"/>
+            <a:ext cx="228600" cy="365760"/>
+          </a:xfrm>
+          <a:prstGeom prst="downArrow">
+            <a:avLst/>
+          </a:prstGeom>
+          <a:solidFill>
+            <a:srgbClr val="666666"/>
+          </a:solidFill>
+          <a:ln>
+            <a:noFill/>
+          </a:ln>
+        </p:spPr>
+        <p:style>
+          <a:lnRef idx="1">
+            <a:schemeClr val="accent1"/>
+          </a:lnRef>
+          <a:fillRef idx="3">
+            <a:schemeClr val="accent1"/>
+          </a:fillRef>
+          <a:effectRef idx="2">
+            <a:schemeClr val="accent1"/>
+          </a:effectRef>
+          <a:fontRef idx="minor">
+            <a:schemeClr val="lt1"/>
+          </a:fontRef>
+        </p:style>
+        <p:txBody>
+          <a:bodyPr rtlCol="0" anchor="ctr"/>
+          <a:lstStyle/>
+          <a:p>
+            <a:pPr algn="ctr"/>
+          </a:p>
+        </p:txBody>
+      </p:sp>
+      <p:sp>
+        <p:nvSpPr>
+          <p:cNvPr id="15" name="Right Arrow 14"/>
+          <p:cNvSpPr/>
+          <p:nvPr/>
+        </p:nvSpPr>
+        <p:spPr>
+          <a:xfrm>
+            <a:off x="5029200" y="3611880"/>
+            <a:ext cx="365760" cy="228600"/>
+          </a:xfrm>
+          <a:prstGeom prst="rightArrow">
+            <a:avLst/>
+          </a:prstGeom>
+          <a:solidFill>
+            <a:srgbClr val="666666"/>
+          </a:solidFill>
+          <a:ln>
+            <a:noFill/>
+          </a:ln>
+        </p:spPr>
+        <p:style>
+          <a:lnRef idx="1">
+            <a:schemeClr val="accent1"/>
+          </a:lnRef>
+          <a:fillRef idx="3">
+            <a:schemeClr val="accent1"/>
+          </a:fillRef>
+          <a:effectRef idx="2">
+            <a:schemeClr val="accent1"/>
+          </a:effectRef>
+          <a:fontRef idx="minor">
+            <a:schemeClr val="lt1"/>
+          </a:fontRef>
+        </p:style>
+        <p:txBody>
+          <a:bodyPr rtlCol="0" anchor="ctr"/>
+          <a:lstStyle/>
+          <a:p>
+            <a:pPr algn="ctr"/>
+          </a:p>
+        </p:txBody>
+      </p:sp>
+      <p:sp>
+        <p:nvSpPr>
+          <p:cNvPr id="16" name="Down Arrow 15"/>
+          <p:cNvSpPr/>
+          <p:nvPr/>
+        </p:nvSpPr>
+        <p:spPr>
+          <a:xfrm>
+            <a:off x="5349240" y="4343400"/>
+            <a:ext cx="228600" cy="365760"/>
+          </a:xfrm>
+          <a:prstGeom prst="downArrow">
+            <a:avLst/>
+          </a:prstGeom>
+          <a:solidFill>
+            <a:srgbClr val="666666"/>
+          </a:solidFill>
+          <a:ln>
+            <a:noFill/>
+          </a:ln>
+        </p:spPr>
+        <p:style>
+          <a:lnRef idx="1">
+            <a:schemeClr val="accent1"/>
+          </a:lnRef>
+          <a:fillRef idx="3">
+            <a:schemeClr val="accent1"/>
+          </a:fillRef>
+          <a:effectRef idx="2">
+            <a:schemeClr val="accent1"/>
+          </a:effectRef>
+          <a:fontRef idx="minor">
+            <a:schemeClr val="lt1"/>
+          </a:fontRef>
+        </p:style>
+        <p:txBody>
+          <a:bodyPr rtlCol="0" anchor="ctr"/>
+          <a:lstStyle/>
+          <a:p>
+            <a:pPr algn="ctr"/>
+          </a:p>
+        </p:txBody>
+      </p:sp>
+      <p:sp>
+        <p:nvSpPr>
+          <p:cNvPr id="17" name="TextBox 16"/>
+          <p:cNvSpPr txBox="1"/>
+          <p:nvPr/>
+        </p:nvSpPr>
+        <p:spPr>
+          <a:xfrm>
+            <a:off x="2286000" y="1463040"/>
+            <a:ext cx="1371600" cy="365760"/>
+          </a:xfrm>
+          <a:prstGeom prst="rect">
+            <a:avLst/>
+          </a:prstGeom>
+          <a:noFill/>
+        </p:spPr>
+        <p:txBody>
+          <a:bodyPr wrap="none">
+            <a:spAutoFit/>
+          </a:bodyPr>
+          <a:lstStyle/>
           <a:p>
             <a:pPr>
-              <a:spcAft>
-                <a:spcPts val="1200"/>
-              </a:spcAft>
-              <a:defRPr sz="2000">
-                <a:solidFill>
-                  <a:srgbClr val="333333"/>
-                </a:solidFill>
-              </a:defRPr>
-            </a:pPr>
-            <a:r>
-              <a:t>• Reinforcement Learning (RL): Learn from reward signals</a:t>
-            </a:r>
-          </a:p>
+              <a:defRPr sz="1000" i="1">
+                <a:solidFill>
+                  <a:srgbClr val="666666"/>
+                </a:solidFill>
+              </a:defRPr>
+            </a:pPr>
+            <a:r>
+              <a:t>requests</a:t>
+            </a:r>
+          </a:p>
+        </p:txBody>
+      </p:sp>
+      <p:sp>
+        <p:nvSpPr>
+          <p:cNvPr id="18" name="TextBox 17"/>
+          <p:cNvSpPr txBox="1"/>
+          <p:nvPr/>
+        </p:nvSpPr>
+        <p:spPr>
+          <a:xfrm>
+            <a:off x="4846320" y="1783080"/>
+            <a:ext cx="1371600" cy="365760"/>
+          </a:xfrm>
+          <a:prstGeom prst="rect">
+            <a:avLst/>
+          </a:prstGeom>
+          <a:noFill/>
+        </p:spPr>
+        <p:txBody>
+          <a:bodyPr wrap="none">
+            <a:spAutoFit/>
+          </a:bodyPr>
+          <a:lstStyle/>
           <a:p>
             <a:pPr>
-              <a:spcAft>
-                <a:spcPts val="1200"/>
-              </a:spcAft>
-              <a:defRPr sz="2000">
-                <a:solidFill>
-                  <a:srgbClr val="333333"/>
-                </a:solidFill>
-              </a:defRPr>
-            </a:pPr>
-            <a:r>
-              <a:t>• Preference Learning: Learn from pairwise comparisons</a:t>
-            </a:r>
-          </a:p>
+              <a:defRPr sz="1000" i="1">
+                <a:solidFill>
+                  <a:srgbClr val="666666"/>
+                </a:solidFill>
+              </a:defRPr>
+            </a:pPr>
+            <a:r>
+              <a:t>load</a:t>
+            </a:r>
+          </a:p>
+        </p:txBody>
+      </p:sp>
+      <p:sp>
+        <p:nvSpPr>
+          <p:cNvPr id="19" name="TextBox 18"/>
+          <p:cNvSpPr txBox="1"/>
+          <p:nvPr/>
+        </p:nvSpPr>
+        <p:spPr>
+          <a:xfrm>
+            <a:off x="4114800" y="2834640"/>
+            <a:ext cx="1371600" cy="365760"/>
+          </a:xfrm>
+          <a:prstGeom prst="rect">
+            <a:avLst/>
+          </a:prstGeom>
+          <a:noFill/>
+        </p:spPr>
+        <p:txBody>
+          <a:bodyPr wrap="none">
+            <a:spAutoFit/>
+          </a:bodyPr>
+          <a:lstStyle/>
           <a:p>
             <a:pPr>
-              <a:spcAft>
-                <a:spcPts val="1200"/>
-              </a:spcAft>
-              <a:defRPr sz="2000">
-                <a:solidFill>
-                  <a:srgbClr val="333333"/>
-                </a:solidFill>
-              </a:defRPr>
-            </a:pPr>
-            <a:r>
-              <a:t>• Distillation: Transfer knowledge from teacher to student</a:t>
-            </a:r>
-          </a:p>
+              <a:defRPr sz="1000" i="1">
+                <a:solidFill>
+                  <a:srgbClr val="666666"/>
+                </a:solidFill>
+              </a:defRPr>
+            </a:pPr>
+            <a:r>
+              <a:t>schedule</a:t>
+            </a:r>
+          </a:p>
+        </p:txBody>
+      </p:sp>
+      <p:sp>
+        <p:nvSpPr>
+          <p:cNvPr id="20" name="TextBox 19"/>
+          <p:cNvSpPr txBox="1"/>
+          <p:nvPr/>
+        </p:nvSpPr>
+        <p:spPr>
+          <a:xfrm>
+            <a:off x="5029200" y="3246120"/>
+            <a:ext cx="1371600" cy="365760"/>
+          </a:xfrm>
+          <a:prstGeom prst="rect">
+            <a:avLst/>
+          </a:prstGeom>
+          <a:noFill/>
+        </p:spPr>
+        <p:txBody>
+          <a:bodyPr wrap="none">
+            <a:spAutoFit/>
+          </a:bodyPr>
+          <a:lstStyle/>
           <a:p>
             <a:pPr>
-              <a:spcAft>
-                <a:spcPts val="1200"/>
-              </a:spcAft>
-              <a:defRPr sz="2000">
-                <a:solidFill>
-                  <a:srgbClr val="333333"/>
-                </a:solidFill>
-              </a:defRPr>
-            </a:pPr>
-            <a:r>
-              <a:t>• DPO: Direct Preference Optimization</a:t>
+              <a:defRPr sz="1000" i="1">
+                <a:solidFill>
+                  <a:srgbClr val="666666"/>
+                </a:solidFill>
+              </a:defRPr>
+            </a:pPr>
+            <a:r>
+              <a:t>train</a:t>
+            </a:r>
+          </a:p>
+        </p:txBody>
+      </p:sp>
+      <p:sp>
+        <p:nvSpPr>
+          <p:cNvPr id="21" name="TextBox 20"/>
+          <p:cNvSpPr txBox="1"/>
+          <p:nvPr/>
+        </p:nvSpPr>
+        <p:spPr>
+          <a:xfrm>
+            <a:off x="5577840" y="4389120"/>
+            <a:ext cx="1371600" cy="365760"/>
+          </a:xfrm>
+          <a:prstGeom prst="rect">
+            <a:avLst/>
+          </a:prstGeom>
+          <a:noFill/>
+        </p:spPr>
+        <p:txBody>
+          <a:bodyPr wrap="none">
+            <a:spAutoFit/>
+          </a:bodyPr>
+          <a:lstStyle/>
+          <a:p>
+            <a:pPr>
+              <a:defRPr sz="1000" i="1">
+                <a:solidFill>
+                  <a:srgbClr val="666666"/>
+                </a:solidFill>
+              </a:defRPr>
+            </a:pPr>
+            <a:r>
+              <a:t>save</a:t>
+            </a:r>
+          </a:p>
+        </p:txBody>
+      </p:sp>
+      <p:sp>
+        <p:nvSpPr>
+          <p:cNvPr id="22" name="TextBox 21"/>
+          <p:cNvSpPr txBox="1"/>
+          <p:nvPr/>
+        </p:nvSpPr>
+        <p:spPr>
+          <a:xfrm>
+            <a:off x="274320" y="5852160"/>
+            <a:ext cx="8595360" cy="457200"/>
+          </a:xfrm>
+          <a:prstGeom prst="rect">
+            <a:avLst/>
+          </a:prstGeom>
+          <a:noFill/>
+        </p:spPr>
+        <p:txBody>
+          <a:bodyPr wrap="none">
+            <a:spAutoFit/>
+          </a:bodyPr>
+          <a:lstStyle/>
+          <a:p>
+            <a:pPr algn="ctr">
+              <a:defRPr sz="1300">
+                <a:solidFill>
+                  <a:srgbClr val="666666"/>
+                </a:solidFill>
+              </a:defRPr>
+            </a:pPr>
+            <a:r>
+              <a:t>Tinker handles GPU allocation, model loading, and checkpointing - you just write training code</a:t>
             </a:r>
           </a:p>
         </p:txBody>
@@ -4068,8 +5065,8 @@
         </p:nvSpPr>
         <p:spPr>
           <a:xfrm>
-            <a:off x="457200" y="274320"/>
-            <a:ext cx="8229600" cy="731520"/>
+            <a:off x="457200" y="137160"/>
+            <a:ext cx="8229600" cy="640080"/>
           </a:xfrm>
           <a:prstGeom prst="rect">
             <a:avLst/>
@@ -4083,14 +5080,2746 @@
           <a:lstStyle/>
           <a:p>
             <a:pPr>
-              <a:defRPr sz="3200" b="1">
+              <a:defRPr sz="2800" b="1">
                 <a:solidFill>
                   <a:srgbClr val="1A1A2E"/>
                 </a:solidFill>
               </a:defRPr>
             </a:pPr>
             <a:r>
-              <a:t>Experiments Run</a:t>
+              <a:t>LoRA: Low-Rank Adaptation</a:t>
+            </a:r>
+          </a:p>
+        </p:txBody>
+      </p:sp>
+      <p:sp>
+        <p:nvSpPr>
+          <p:cNvPr id="3" name="Rounded Rectangle 2"/>
+          <p:cNvSpPr/>
+          <p:nvPr/>
+        </p:nvSpPr>
+        <p:spPr>
+          <a:xfrm>
+            <a:off x="457200" y="1828800"/>
+            <a:ext cx="2286000" cy="2286000"/>
+          </a:xfrm>
+          <a:prstGeom prst="roundRect">
+            <a:avLst/>
+          </a:prstGeom>
+          <a:solidFill>
+            <a:srgbClr val="666666"/>
+          </a:solidFill>
+          <a:ln w="19050">
+            <a:solidFill>
+              <a:srgbClr val="333333"/>
+            </a:solidFill>
+          </a:ln>
+        </p:spPr>
+        <p:style>
+          <a:lnRef idx="1">
+            <a:schemeClr val="accent1"/>
+          </a:lnRef>
+          <a:fillRef idx="3">
+            <a:schemeClr val="accent1"/>
+          </a:fillRef>
+          <a:effectRef idx="2">
+            <a:schemeClr val="accent1"/>
+          </a:effectRef>
+          <a:fontRef idx="minor">
+            <a:schemeClr val="lt1"/>
+          </a:fontRef>
+        </p:style>
+        <p:txBody>
+          <a:bodyPr rtlCol="0" anchor="ctr" wrap="square"/>
+          <a:lstStyle/>
+          <a:p>
+            <a:pPr algn="ctr">
+              <a:defRPr sz="1400" b="1">
+                <a:solidFill>
+                  <a:srgbClr val="FFFFFF"/>
+                </a:solidFill>
+              </a:defRPr>
+            </a:pPr>
+            <a:r>
+              <a:t>W₀</a:t>
+            </a:r>
+            <a:br/>
+            <a:r>
+              <a:t>(Frozen)</a:t>
+            </a:r>
+            <a:br/>
+            <a:br/>
+            <a:r>
+              <a:t>d × d</a:t>
+            </a:r>
+          </a:p>
+        </p:txBody>
+      </p:sp>
+      <p:sp>
+        <p:nvSpPr>
+          <p:cNvPr id="4" name="TextBox 3"/>
+          <p:cNvSpPr txBox="1"/>
+          <p:nvPr/>
+        </p:nvSpPr>
+        <p:spPr>
+          <a:xfrm>
+            <a:off x="2834640" y="2743200"/>
+            <a:ext cx="457200" cy="457200"/>
+          </a:xfrm>
+          <a:prstGeom prst="rect">
+            <a:avLst/>
+          </a:prstGeom>
+          <a:noFill/>
+        </p:spPr>
+        <p:txBody>
+          <a:bodyPr wrap="none">
+            <a:spAutoFit/>
+          </a:bodyPr>
+          <a:lstStyle/>
+          <a:p>
+            <a:pPr>
+              <a:defRPr sz="3600" b="1">
+                <a:solidFill>
+                  <a:srgbClr val="1A1A2E"/>
+                </a:solidFill>
+              </a:defRPr>
+            </a:pPr>
+            <a:r>
+              <a:t>+</a:t>
+            </a:r>
+          </a:p>
+        </p:txBody>
+      </p:sp>
+      <p:sp>
+        <p:nvSpPr>
+          <p:cNvPr id="5" name="Rounded Rectangle 4"/>
+          <p:cNvSpPr/>
+          <p:nvPr/>
+        </p:nvSpPr>
+        <p:spPr>
+          <a:xfrm>
+            <a:off x="3474720" y="1645920"/>
+            <a:ext cx="731520" cy="2286000"/>
+          </a:xfrm>
+          <a:prstGeom prst="roundRect">
+            <a:avLst/>
+          </a:prstGeom>
+          <a:solidFill>
+            <a:srgbClr val="4169E1"/>
+          </a:solidFill>
+          <a:ln w="19050">
+            <a:solidFill>
+              <a:srgbClr val="333333"/>
+            </a:solidFill>
+          </a:ln>
+        </p:spPr>
+        <p:style>
+          <a:lnRef idx="1">
+            <a:schemeClr val="accent1"/>
+          </a:lnRef>
+          <a:fillRef idx="3">
+            <a:schemeClr val="accent1"/>
+          </a:fillRef>
+          <a:effectRef idx="2">
+            <a:schemeClr val="accent1"/>
+          </a:effectRef>
+          <a:fontRef idx="minor">
+            <a:schemeClr val="lt1"/>
+          </a:fontRef>
+        </p:style>
+        <p:txBody>
+          <a:bodyPr rtlCol="0" anchor="ctr" wrap="square"/>
+          <a:lstStyle/>
+          <a:p>
+            <a:pPr algn="ctr">
+              <a:defRPr sz="1200" b="1">
+                <a:solidFill>
+                  <a:srgbClr val="FFFFFF"/>
+                </a:solidFill>
+              </a:defRPr>
+            </a:pPr>
+            <a:r>
+              <a:t>B</a:t>
+            </a:r>
+            <a:br/>
+            <a:r>
+              <a:t>d×r</a:t>
+            </a:r>
+          </a:p>
+        </p:txBody>
+      </p:sp>
+      <p:sp>
+        <p:nvSpPr>
+          <p:cNvPr id="6" name="Rounded Rectangle 5"/>
+          <p:cNvSpPr/>
+          <p:nvPr/>
+        </p:nvSpPr>
+        <p:spPr>
+          <a:xfrm>
+            <a:off x="4389120" y="2286000"/>
+            <a:ext cx="1828800" cy="731520"/>
+          </a:xfrm>
+          <a:prstGeom prst="roundRect">
+            <a:avLst/>
+          </a:prstGeom>
+          <a:solidFill>
+            <a:srgbClr val="4169E1"/>
+          </a:solidFill>
+          <a:ln w="19050">
+            <a:solidFill>
+              <a:srgbClr val="333333"/>
+            </a:solidFill>
+          </a:ln>
+        </p:spPr>
+        <p:style>
+          <a:lnRef idx="1">
+            <a:schemeClr val="accent1"/>
+          </a:lnRef>
+          <a:fillRef idx="3">
+            <a:schemeClr val="accent1"/>
+          </a:fillRef>
+          <a:effectRef idx="2">
+            <a:schemeClr val="accent1"/>
+          </a:effectRef>
+          <a:fontRef idx="minor">
+            <a:schemeClr val="lt1"/>
+          </a:fontRef>
+        </p:style>
+        <p:txBody>
+          <a:bodyPr rtlCol="0" anchor="ctr" wrap="square"/>
+          <a:lstStyle/>
+          <a:p>
+            <a:pPr algn="ctr">
+              <a:defRPr sz="1200" b="1">
+                <a:solidFill>
+                  <a:srgbClr val="FFFFFF"/>
+                </a:solidFill>
+              </a:defRPr>
+            </a:pPr>
+            <a:r>
+              <a:t>A (r×d)</a:t>
+            </a:r>
+          </a:p>
+        </p:txBody>
+      </p:sp>
+      <p:sp>
+        <p:nvSpPr>
+          <p:cNvPr id="7" name="TextBox 6"/>
+          <p:cNvSpPr txBox="1"/>
+          <p:nvPr/>
+        </p:nvSpPr>
+        <p:spPr>
+          <a:xfrm>
+            <a:off x="4114800" y="1828800"/>
+            <a:ext cx="457200" cy="365760"/>
+          </a:xfrm>
+          <a:prstGeom prst="rect">
+            <a:avLst/>
+          </a:prstGeom>
+          <a:noFill/>
+        </p:spPr>
+        <p:txBody>
+          <a:bodyPr wrap="none">
+            <a:spAutoFit/>
+          </a:bodyPr>
+          <a:lstStyle/>
+          <a:p>
+            <a:pPr>
+              <a:defRPr sz="2400" b="1">
+                <a:solidFill>
+                  <a:srgbClr val="1A1A2E"/>
+                </a:solidFill>
+              </a:defRPr>
+            </a:pPr>
+            <a:r>
+              <a:t>×</a:t>
+            </a:r>
+          </a:p>
+        </p:txBody>
+      </p:sp>
+      <p:sp>
+        <p:nvSpPr>
+          <p:cNvPr id="8" name="TextBox 7"/>
+          <p:cNvSpPr txBox="1"/>
+          <p:nvPr/>
+        </p:nvSpPr>
+        <p:spPr>
+          <a:xfrm>
+            <a:off x="6400800" y="2743200"/>
+            <a:ext cx="457200" cy="457200"/>
+          </a:xfrm>
+          <a:prstGeom prst="rect">
+            <a:avLst/>
+          </a:prstGeom>
+          <a:noFill/>
+        </p:spPr>
+        <p:txBody>
+          <a:bodyPr wrap="none">
+            <a:spAutoFit/>
+          </a:bodyPr>
+          <a:lstStyle/>
+          <a:p>
+            <a:pPr>
+              <a:defRPr sz="3600" b="1">
+                <a:solidFill>
+                  <a:srgbClr val="1A1A2E"/>
+                </a:solidFill>
+              </a:defRPr>
+            </a:pPr>
+            <a:r>
+              <a:t>=</a:t>
+            </a:r>
+          </a:p>
+        </p:txBody>
+      </p:sp>
+      <p:sp>
+        <p:nvSpPr>
+          <p:cNvPr id="9" name="Rounded Rectangle 8"/>
+          <p:cNvSpPr/>
+          <p:nvPr/>
+        </p:nvSpPr>
+        <p:spPr>
+          <a:xfrm>
+            <a:off x="6858000" y="1828800"/>
+            <a:ext cx="1828800" cy="2286000"/>
+          </a:xfrm>
+          <a:prstGeom prst="roundRect">
+            <a:avLst/>
+          </a:prstGeom>
+          <a:solidFill>
+            <a:srgbClr val="28A745"/>
+          </a:solidFill>
+          <a:ln w="19050">
+            <a:solidFill>
+              <a:srgbClr val="333333"/>
+            </a:solidFill>
+          </a:ln>
+        </p:spPr>
+        <p:style>
+          <a:lnRef idx="1">
+            <a:schemeClr val="accent1"/>
+          </a:lnRef>
+          <a:fillRef idx="3">
+            <a:schemeClr val="accent1"/>
+          </a:fillRef>
+          <a:effectRef idx="2">
+            <a:schemeClr val="accent1"/>
+          </a:effectRef>
+          <a:fontRef idx="minor">
+            <a:schemeClr val="lt1"/>
+          </a:fontRef>
+        </p:style>
+        <p:txBody>
+          <a:bodyPr rtlCol="0" anchor="ctr" wrap="square"/>
+          <a:lstStyle/>
+          <a:p>
+            <a:pPr algn="ctr">
+              <a:defRPr sz="1400" b="1">
+                <a:solidFill>
+                  <a:srgbClr val="FFFFFF"/>
+                </a:solidFill>
+              </a:defRPr>
+            </a:pPr>
+            <a:r>
+              <a:t>W₀ + BA</a:t>
+            </a:r>
+            <a:br/>
+            <a:r>
+              <a:t>(Effective)</a:t>
+            </a:r>
+            <a:br/>
+            <a:br/>
+            <a:r>
+              <a:t>d × d</a:t>
+            </a:r>
+          </a:p>
+        </p:txBody>
+      </p:sp>
+      <p:sp>
+        <p:nvSpPr>
+          <p:cNvPr id="10" name="TextBox 9"/>
+          <p:cNvSpPr txBox="1"/>
+          <p:nvPr/>
+        </p:nvSpPr>
+        <p:spPr>
+          <a:xfrm>
+            <a:off x="457200" y="4297680"/>
+            <a:ext cx="2011680" cy="731520"/>
+          </a:xfrm>
+          <a:prstGeom prst="rect">
+            <a:avLst/>
+          </a:prstGeom>
+          <a:noFill/>
+        </p:spPr>
+        <p:txBody>
+          <a:bodyPr wrap="square">
+            <a:spAutoFit/>
+          </a:bodyPr>
+          <a:lstStyle/>
+          <a:p>
+            <a:pPr algn="ctr">
+              <a:defRPr sz="1100">
+                <a:solidFill>
+                  <a:srgbClr val="666666"/>
+                </a:solidFill>
+              </a:defRPr>
+            </a:pPr>
+            <a:r>
+              <a:t>Original model</a:t>
+            </a:r>
+            <a:br/>
+            <a:r>
+              <a:t>weights (billions)</a:t>
+            </a:r>
+          </a:p>
+        </p:txBody>
+      </p:sp>
+      <p:sp>
+        <p:nvSpPr>
+          <p:cNvPr id="11" name="TextBox 10"/>
+          <p:cNvSpPr txBox="1"/>
+          <p:nvPr/>
+        </p:nvSpPr>
+        <p:spPr>
+          <a:xfrm>
+            <a:off x="3474720" y="4297680"/>
+            <a:ext cx="2011680" cy="731520"/>
+          </a:xfrm>
+          <a:prstGeom prst="rect">
+            <a:avLst/>
+          </a:prstGeom>
+          <a:noFill/>
+        </p:spPr>
+        <p:txBody>
+          <a:bodyPr wrap="square">
+            <a:spAutoFit/>
+          </a:bodyPr>
+          <a:lstStyle/>
+          <a:p>
+            <a:pPr algn="ctr">
+              <a:defRPr sz="1100">
+                <a:solidFill>
+                  <a:srgbClr val="4169E1"/>
+                </a:solidFill>
+              </a:defRPr>
+            </a:pPr>
+            <a:r>
+              <a:t>LoRA adapters</a:t>
+            </a:r>
+            <a:br/>
+            <a:r>
+              <a:t>(millions)</a:t>
+            </a:r>
+          </a:p>
+        </p:txBody>
+      </p:sp>
+      <p:sp>
+        <p:nvSpPr>
+          <p:cNvPr id="12" name="TextBox 11"/>
+          <p:cNvSpPr txBox="1"/>
+          <p:nvPr/>
+        </p:nvSpPr>
+        <p:spPr>
+          <a:xfrm>
+            <a:off x="6858000" y="4297680"/>
+            <a:ext cx="2011680" cy="731520"/>
+          </a:xfrm>
+          <a:prstGeom prst="rect">
+            <a:avLst/>
+          </a:prstGeom>
+          <a:noFill/>
+        </p:spPr>
+        <p:txBody>
+          <a:bodyPr wrap="square">
+            <a:spAutoFit/>
+          </a:bodyPr>
+          <a:lstStyle/>
+          <a:p>
+            <a:pPr algn="ctr">
+              <a:defRPr sz="1100">
+                <a:solidFill>
+                  <a:srgbClr val="28A745"/>
+                </a:solidFill>
+              </a:defRPr>
+            </a:pPr>
+            <a:r>
+              <a:t>Combined for</a:t>
+            </a:r>
+            <a:br/>
+            <a:r>
+              <a:t>inference</a:t>
+            </a:r>
+          </a:p>
+        </p:txBody>
+      </p:sp>
+      <p:sp>
+        <p:nvSpPr>
+          <p:cNvPr id="13" name="TextBox 12"/>
+          <p:cNvSpPr txBox="1"/>
+          <p:nvPr/>
+        </p:nvSpPr>
+        <p:spPr>
+          <a:xfrm>
+            <a:off x="457200" y="5303520"/>
+            <a:ext cx="8229600" cy="731520"/>
+          </a:xfrm>
+          <a:prstGeom prst="rect">
+            <a:avLst/>
+          </a:prstGeom>
+          <a:noFill/>
+        </p:spPr>
+        <p:txBody>
+          <a:bodyPr wrap="none">
+            <a:spAutoFit/>
+          </a:bodyPr>
+          <a:lstStyle/>
+          <a:p>
+            <a:pPr algn="ctr">
+              <a:defRPr sz="1400">
+                <a:solidFill>
+                  <a:srgbClr val="1A1A2E"/>
+                </a:solidFill>
+              </a:defRPr>
+            </a:pPr>
+            <a:r>
+              <a:t>rank r &lt;&lt; d: Train only ~0.1% of parameters while preserving model capabilities</a:t>
+            </a:r>
+          </a:p>
+          <a:p>
+            <a:pPr algn="ctr">
+              <a:defRPr sz="1200">
+                <a:solidFill>
+                  <a:srgbClr val="666666"/>
+                </a:solidFill>
+              </a:defRPr>
+            </a:pPr>
+            <a:r>
+              <a:t>Example: d=4096, r=32 → 99.2% fewer trainable parameters</a:t>
+            </a:r>
+          </a:p>
+        </p:txBody>
+      </p:sp>
+    </p:spTree>
+  </p:cSld>
+  <p:clrMapOvr>
+    <a:masterClrMapping/>
+  </p:clrMapOvr>
+</p:sld>
+</file>
+
+<file path=ppt/slides/slide5.xml><?xml version="1.0" encoding="utf-8"?>
+<p:sld xmlns:a="http://schemas.openxmlformats.org/drawingml/2006/main" xmlns:p="http://schemas.openxmlformats.org/presentationml/2006/main" xmlns:r="http://schemas.openxmlformats.org/officeDocument/2006/relationships">
+  <p:cSld>
+    <p:spTree>
+      <p:nvGrpSpPr>
+        <p:cNvPr id="1" name=""/>
+        <p:cNvGrpSpPr/>
+        <p:nvPr/>
+      </p:nvGrpSpPr>
+      <p:grpSpPr/>
+      <p:sp>
+        <p:nvSpPr>
+          <p:cNvPr id="2" name="TextBox 1"/>
+          <p:cNvSpPr txBox="1"/>
+          <p:nvPr/>
+        </p:nvSpPr>
+        <p:spPr>
+          <a:xfrm>
+            <a:off x="457200" y="137160"/>
+            <a:ext cx="8229600" cy="640080"/>
+          </a:xfrm>
+          <a:prstGeom prst="rect">
+            <a:avLst/>
+          </a:prstGeom>
+          <a:noFill/>
+        </p:spPr>
+        <p:txBody>
+          <a:bodyPr wrap="none">
+            <a:spAutoFit/>
+          </a:bodyPr>
+          <a:lstStyle/>
+          <a:p>
+            <a:pPr>
+              <a:defRPr sz="2800" b="1">
+                <a:solidFill>
+                  <a:srgbClr val="1A1A2E"/>
+                </a:solidFill>
+              </a:defRPr>
+            </a:pPr>
+            <a:r>
+              <a:t>Reinforcement Learning Training Loop</a:t>
+            </a:r>
+          </a:p>
+        </p:txBody>
+      </p:sp>
+      <p:sp>
+        <p:nvSpPr>
+          <p:cNvPr id="3" name="Rounded Rectangle 2"/>
+          <p:cNvSpPr/>
+          <p:nvPr/>
+        </p:nvSpPr>
+        <p:spPr>
+          <a:xfrm>
+            <a:off x="3657600" y="2560320"/>
+            <a:ext cx="1828800" cy="1097280"/>
+          </a:xfrm>
+          <a:prstGeom prst="roundRect">
+            <a:avLst/>
+          </a:prstGeom>
+          <a:solidFill>
+            <a:srgbClr val="4169E1"/>
+          </a:solidFill>
+          <a:ln w="19050">
+            <a:solidFill>
+              <a:srgbClr val="333333"/>
+            </a:solidFill>
+          </a:ln>
+        </p:spPr>
+        <p:style>
+          <a:lnRef idx="1">
+            <a:schemeClr val="accent1"/>
+          </a:lnRef>
+          <a:fillRef idx="3">
+            <a:schemeClr val="accent1"/>
+          </a:fillRef>
+          <a:effectRef idx="2">
+            <a:schemeClr val="accent1"/>
+          </a:effectRef>
+          <a:fontRef idx="minor">
+            <a:schemeClr val="lt1"/>
+          </a:fontRef>
+        </p:style>
+        <p:txBody>
+          <a:bodyPr rtlCol="0" anchor="ctr" wrap="square"/>
+          <a:lstStyle/>
+          <a:p>
+            <a:pPr algn="ctr">
+              <a:defRPr sz="1400" b="1">
+                <a:solidFill>
+                  <a:srgbClr val="FFFFFF"/>
+                </a:solidFill>
+              </a:defRPr>
+            </a:pPr>
+            <a:r>
+              <a:t>LLM</a:t>
+            </a:r>
+            <a:br/>
+            <a:r>
+              <a:t>(Policy π)</a:t>
+            </a:r>
+          </a:p>
+        </p:txBody>
+      </p:sp>
+      <p:sp>
+        <p:nvSpPr>
+          <p:cNvPr id="4" name="Rounded Rectangle 3"/>
+          <p:cNvSpPr/>
+          <p:nvPr/>
+        </p:nvSpPr>
+        <p:spPr>
+          <a:xfrm>
+            <a:off x="6858000" y="2560320"/>
+            <a:ext cx="1828800" cy="1097280"/>
+          </a:xfrm>
+          <a:prstGeom prst="roundRect">
+            <a:avLst/>
+          </a:prstGeom>
+          <a:solidFill>
+            <a:srgbClr val="28A745"/>
+          </a:solidFill>
+          <a:ln w="19050">
+            <a:solidFill>
+              <a:srgbClr val="333333"/>
+            </a:solidFill>
+          </a:ln>
+        </p:spPr>
+        <p:style>
+          <a:lnRef idx="1">
+            <a:schemeClr val="accent1"/>
+          </a:lnRef>
+          <a:fillRef idx="3">
+            <a:schemeClr val="accent1"/>
+          </a:fillRef>
+          <a:effectRef idx="2">
+            <a:schemeClr val="accent1"/>
+          </a:effectRef>
+          <a:fontRef idx="minor">
+            <a:schemeClr val="lt1"/>
+          </a:fontRef>
+        </p:style>
+        <p:txBody>
+          <a:bodyPr rtlCol="0" anchor="ctr" wrap="square"/>
+          <a:lstStyle/>
+          <a:p>
+            <a:pPr algn="ctr">
+              <a:defRPr sz="1400" b="1">
+                <a:solidFill>
+                  <a:srgbClr val="FFFFFF"/>
+                </a:solidFill>
+              </a:defRPr>
+            </a:pPr>
+            <a:r>
+              <a:t>Environment</a:t>
+            </a:r>
+            <a:br/>
+            <a:r>
+              <a:t>(Task)</a:t>
+            </a:r>
+          </a:p>
+        </p:txBody>
+      </p:sp>
+      <p:sp>
+        <p:nvSpPr>
+          <p:cNvPr id="5" name="Rounded Rectangle 4"/>
+          <p:cNvSpPr/>
+          <p:nvPr/>
+        </p:nvSpPr>
+        <p:spPr>
+          <a:xfrm>
+            <a:off x="6858000" y="4572000"/>
+            <a:ext cx="1828800" cy="822960"/>
+          </a:xfrm>
+          <a:prstGeom prst="roundRect">
+            <a:avLst/>
+          </a:prstGeom>
+          <a:solidFill>
+            <a:srgbClr val="FF8C00"/>
+          </a:solidFill>
+          <a:ln w="19050">
+            <a:solidFill>
+              <a:srgbClr val="333333"/>
+            </a:solidFill>
+          </a:ln>
+        </p:spPr>
+        <p:style>
+          <a:lnRef idx="1">
+            <a:schemeClr val="accent1"/>
+          </a:lnRef>
+          <a:fillRef idx="3">
+            <a:schemeClr val="accent1"/>
+          </a:fillRef>
+          <a:effectRef idx="2">
+            <a:schemeClr val="accent1"/>
+          </a:effectRef>
+          <a:fontRef idx="minor">
+            <a:schemeClr val="lt1"/>
+          </a:fontRef>
+        </p:style>
+        <p:txBody>
+          <a:bodyPr rtlCol="0" anchor="ctr" wrap="square"/>
+          <a:lstStyle/>
+          <a:p>
+            <a:pPr algn="ctr">
+              <a:defRPr sz="1300" b="1">
+                <a:solidFill>
+                  <a:srgbClr val="FFFFFF"/>
+                </a:solidFill>
+              </a:defRPr>
+            </a:pPr>
+            <a:r>
+              <a:t>Reward r(s,a)</a:t>
+            </a:r>
+          </a:p>
+        </p:txBody>
+      </p:sp>
+      <p:sp>
+        <p:nvSpPr>
+          <p:cNvPr id="6" name="Rounded Rectangle 5"/>
+          <p:cNvSpPr/>
+          <p:nvPr/>
+        </p:nvSpPr>
+        <p:spPr>
+          <a:xfrm>
+            <a:off x="457200" y="2560320"/>
+            <a:ext cx="1828800" cy="1097280"/>
+          </a:xfrm>
+          <a:prstGeom prst="roundRect">
+            <a:avLst/>
+          </a:prstGeom>
+          <a:solidFill>
+            <a:srgbClr val="6F42C1"/>
+          </a:solidFill>
+          <a:ln w="19050">
+            <a:solidFill>
+              <a:srgbClr val="333333"/>
+            </a:solidFill>
+          </a:ln>
+        </p:spPr>
+        <p:style>
+          <a:lnRef idx="1">
+            <a:schemeClr val="accent1"/>
+          </a:lnRef>
+          <a:fillRef idx="3">
+            <a:schemeClr val="accent1"/>
+          </a:fillRef>
+          <a:effectRef idx="2">
+            <a:schemeClr val="accent1"/>
+          </a:effectRef>
+          <a:fontRef idx="minor">
+            <a:schemeClr val="lt1"/>
+          </a:fontRef>
+        </p:style>
+        <p:txBody>
+          <a:bodyPr rtlCol="0" anchor="ctr" wrap="square"/>
+          <a:lstStyle/>
+          <a:p>
+            <a:pPr algn="ctr">
+              <a:defRPr sz="1400" b="1">
+                <a:solidFill>
+                  <a:srgbClr val="FFFFFF"/>
+                </a:solidFill>
+              </a:defRPr>
+            </a:pPr>
+            <a:r>
+              <a:t>Optimizer</a:t>
+            </a:r>
+            <a:br/>
+            <a:r>
+              <a:t>(LoRA SGD)</a:t>
+            </a:r>
+          </a:p>
+        </p:txBody>
+      </p:sp>
+      <p:sp>
+        <p:nvSpPr>
+          <p:cNvPr id="7" name="Right Arrow 6"/>
+          <p:cNvSpPr/>
+          <p:nvPr/>
+        </p:nvSpPr>
+        <p:spPr>
+          <a:xfrm>
+            <a:off x="5486400" y="2971800"/>
+            <a:ext cx="1280160" cy="228600"/>
+          </a:xfrm>
+          <a:prstGeom prst="rightArrow">
+            <a:avLst/>
+          </a:prstGeom>
+          <a:solidFill>
+            <a:srgbClr val="666666"/>
+          </a:solidFill>
+          <a:ln>
+            <a:noFill/>
+          </a:ln>
+        </p:spPr>
+        <p:style>
+          <a:lnRef idx="1">
+            <a:schemeClr val="accent1"/>
+          </a:lnRef>
+          <a:fillRef idx="3">
+            <a:schemeClr val="accent1"/>
+          </a:fillRef>
+          <a:effectRef idx="2">
+            <a:schemeClr val="accent1"/>
+          </a:effectRef>
+          <a:fontRef idx="minor">
+            <a:schemeClr val="lt1"/>
+          </a:fontRef>
+        </p:style>
+        <p:txBody>
+          <a:bodyPr rtlCol="0" anchor="ctr"/>
+          <a:lstStyle/>
+          <a:p>
+            <a:pPr algn="ctr"/>
+          </a:p>
+        </p:txBody>
+      </p:sp>
+      <p:sp>
+        <p:nvSpPr>
+          <p:cNvPr id="8" name="Down Arrow 7"/>
+          <p:cNvSpPr/>
+          <p:nvPr/>
+        </p:nvSpPr>
+        <p:spPr>
+          <a:xfrm>
+            <a:off x="7635240" y="3703320"/>
+            <a:ext cx="228600" cy="777240"/>
+          </a:xfrm>
+          <a:prstGeom prst="downArrow">
+            <a:avLst/>
+          </a:prstGeom>
+          <a:solidFill>
+            <a:srgbClr val="666666"/>
+          </a:solidFill>
+          <a:ln>
+            <a:noFill/>
+          </a:ln>
+        </p:spPr>
+        <p:style>
+          <a:lnRef idx="1">
+            <a:schemeClr val="accent1"/>
+          </a:lnRef>
+          <a:fillRef idx="3">
+            <a:schemeClr val="accent1"/>
+          </a:fillRef>
+          <a:effectRef idx="2">
+            <a:schemeClr val="accent1"/>
+          </a:effectRef>
+          <a:fontRef idx="minor">
+            <a:schemeClr val="lt1"/>
+          </a:fontRef>
+        </p:style>
+        <p:txBody>
+          <a:bodyPr rtlCol="0" anchor="ctr"/>
+          <a:lstStyle/>
+          <a:p>
+            <a:pPr algn="ctr"/>
+          </a:p>
+        </p:txBody>
+      </p:sp>
+      <p:sp>
+        <p:nvSpPr>
+          <p:cNvPr id="9" name="Left Arrow 8"/>
+          <p:cNvSpPr/>
+          <p:nvPr/>
+        </p:nvSpPr>
+        <p:spPr>
+          <a:xfrm>
+            <a:off x="2377440" y="4754880"/>
+            <a:ext cx="4389120" cy="228600"/>
+          </a:xfrm>
+          <a:prstGeom prst="leftArrow">
+            <a:avLst/>
+          </a:prstGeom>
+          <a:solidFill>
+            <a:srgbClr val="666666"/>
+          </a:solidFill>
+          <a:ln>
+            <a:noFill/>
+          </a:ln>
+        </p:spPr>
+        <p:style>
+          <a:lnRef idx="1">
+            <a:schemeClr val="accent1"/>
+          </a:lnRef>
+          <a:fillRef idx="3">
+            <a:schemeClr val="accent1"/>
+          </a:fillRef>
+          <a:effectRef idx="2">
+            <a:schemeClr val="accent1"/>
+          </a:effectRef>
+          <a:fontRef idx="minor">
+            <a:schemeClr val="lt1"/>
+          </a:fontRef>
+        </p:style>
+        <p:txBody>
+          <a:bodyPr rtlCol="0" anchor="ctr"/>
+          <a:lstStyle/>
+          <a:p>
+            <a:pPr algn="ctr"/>
+          </a:p>
+        </p:txBody>
+      </p:sp>
+      <p:sp>
+        <p:nvSpPr>
+          <p:cNvPr id="10" name="Up Arrow 9"/>
+          <p:cNvSpPr/>
+          <p:nvPr/>
+        </p:nvSpPr>
+        <p:spPr>
+          <a:xfrm>
+            <a:off x="1234440" y="3703320"/>
+            <a:ext cx="228600" cy="594360"/>
+          </a:xfrm>
+          <a:prstGeom prst="upArrow">
+            <a:avLst/>
+          </a:prstGeom>
+          <a:solidFill>
+            <a:srgbClr val="666666"/>
+          </a:solidFill>
+          <a:ln>
+            <a:noFill/>
+          </a:ln>
+        </p:spPr>
+        <p:style>
+          <a:lnRef idx="1">
+            <a:schemeClr val="accent1"/>
+          </a:lnRef>
+          <a:fillRef idx="3">
+            <a:schemeClr val="accent1"/>
+          </a:fillRef>
+          <a:effectRef idx="2">
+            <a:schemeClr val="accent1"/>
+          </a:effectRef>
+          <a:fontRef idx="minor">
+            <a:schemeClr val="lt1"/>
+          </a:fontRef>
+        </p:style>
+        <p:txBody>
+          <a:bodyPr rtlCol="0" anchor="ctr"/>
+          <a:lstStyle/>
+          <a:p>
+            <a:pPr algn="ctr"/>
+          </a:p>
+        </p:txBody>
+      </p:sp>
+      <p:sp>
+        <p:nvSpPr>
+          <p:cNvPr id="11" name="Right Arrow 10"/>
+          <p:cNvSpPr/>
+          <p:nvPr/>
+        </p:nvSpPr>
+        <p:spPr>
+          <a:xfrm>
+            <a:off x="2286000" y="2971800"/>
+            <a:ext cx="1280160" cy="228600"/>
+          </a:xfrm>
+          <a:prstGeom prst="rightArrow">
+            <a:avLst/>
+          </a:prstGeom>
+          <a:solidFill>
+            <a:srgbClr val="666666"/>
+          </a:solidFill>
+          <a:ln>
+            <a:noFill/>
+          </a:ln>
+        </p:spPr>
+        <p:style>
+          <a:lnRef idx="1">
+            <a:schemeClr val="accent1"/>
+          </a:lnRef>
+          <a:fillRef idx="3">
+            <a:schemeClr val="accent1"/>
+          </a:fillRef>
+          <a:effectRef idx="2">
+            <a:schemeClr val="accent1"/>
+          </a:effectRef>
+          <a:fontRef idx="minor">
+            <a:schemeClr val="lt1"/>
+          </a:fontRef>
+        </p:style>
+        <p:txBody>
+          <a:bodyPr rtlCol="0" anchor="ctr"/>
+          <a:lstStyle/>
+          <a:p>
+            <a:pPr algn="ctr"/>
+          </a:p>
+        </p:txBody>
+      </p:sp>
+      <p:sp>
+        <p:nvSpPr>
+          <p:cNvPr id="12" name="TextBox 11"/>
+          <p:cNvSpPr txBox="1"/>
+          <p:nvPr/>
+        </p:nvSpPr>
+        <p:spPr>
+          <a:xfrm>
+            <a:off x="5760720" y="2606040"/>
+            <a:ext cx="1371600" cy="365760"/>
+          </a:xfrm>
+          <a:prstGeom prst="rect">
+            <a:avLst/>
+          </a:prstGeom>
+          <a:noFill/>
+        </p:spPr>
+        <p:txBody>
+          <a:bodyPr wrap="none">
+            <a:spAutoFit/>
+          </a:bodyPr>
+          <a:lstStyle/>
+          <a:p>
+            <a:pPr>
+              <a:defRPr sz="1100" i="1">
+                <a:solidFill>
+                  <a:srgbClr val="666666"/>
+                </a:solidFill>
+              </a:defRPr>
+            </a:pPr>
+            <a:r>
+              <a:t>action a</a:t>
+            </a:r>
+          </a:p>
+        </p:txBody>
+      </p:sp>
+      <p:sp>
+        <p:nvSpPr>
+          <p:cNvPr id="13" name="TextBox 12"/>
+          <p:cNvSpPr txBox="1"/>
+          <p:nvPr/>
+        </p:nvSpPr>
+        <p:spPr>
+          <a:xfrm>
+            <a:off x="7863840" y="4023360"/>
+            <a:ext cx="1371600" cy="365760"/>
+          </a:xfrm>
+          <a:prstGeom prst="rect">
+            <a:avLst/>
+          </a:prstGeom>
+          <a:noFill/>
+        </p:spPr>
+        <p:txBody>
+          <a:bodyPr wrap="none">
+            <a:spAutoFit/>
+          </a:bodyPr>
+          <a:lstStyle/>
+          <a:p>
+            <a:pPr>
+              <a:defRPr sz="1100" i="1">
+                <a:solidFill>
+                  <a:srgbClr val="666666"/>
+                </a:solidFill>
+              </a:defRPr>
+            </a:pPr>
+            <a:r>
+              <a:t>feedback</a:t>
+            </a:r>
+          </a:p>
+        </p:txBody>
+      </p:sp>
+      <p:sp>
+        <p:nvSpPr>
+          <p:cNvPr id="14" name="TextBox 13"/>
+          <p:cNvSpPr txBox="1"/>
+          <p:nvPr/>
+        </p:nvSpPr>
+        <p:spPr>
+          <a:xfrm>
+            <a:off x="4114800" y="4434840"/>
+            <a:ext cx="1371600" cy="365760"/>
+          </a:xfrm>
+          <a:prstGeom prst="rect">
+            <a:avLst/>
+          </a:prstGeom>
+          <a:noFill/>
+        </p:spPr>
+        <p:txBody>
+          <a:bodyPr wrap="none">
+            <a:spAutoFit/>
+          </a:bodyPr>
+          <a:lstStyle/>
+          <a:p>
+            <a:pPr>
+              <a:defRPr sz="1100" i="1">
+                <a:solidFill>
+                  <a:srgbClr val="666666"/>
+                </a:solidFill>
+              </a:defRPr>
+            </a:pPr>
+            <a:r>
+              <a:t>gradient ∇J</a:t>
+            </a:r>
+          </a:p>
+        </p:txBody>
+      </p:sp>
+      <p:sp>
+        <p:nvSpPr>
+          <p:cNvPr id="15" name="TextBox 14"/>
+          <p:cNvSpPr txBox="1"/>
+          <p:nvPr/>
+        </p:nvSpPr>
+        <p:spPr>
+          <a:xfrm>
+            <a:off x="2560320" y="2606040"/>
+            <a:ext cx="1371600" cy="365760"/>
+          </a:xfrm>
+          <a:prstGeom prst="rect">
+            <a:avLst/>
+          </a:prstGeom>
+          <a:noFill/>
+        </p:spPr>
+        <p:txBody>
+          <a:bodyPr wrap="none">
+            <a:spAutoFit/>
+          </a:bodyPr>
+          <a:lstStyle/>
+          <a:p>
+            <a:pPr>
+              <a:defRPr sz="1100" i="1">
+                <a:solidFill>
+                  <a:srgbClr val="666666"/>
+                </a:solidFill>
+              </a:defRPr>
+            </a:pPr>
+            <a:r>
+              <a:t>θ update</a:t>
+            </a:r>
+          </a:p>
+        </p:txBody>
+      </p:sp>
+      <p:sp>
+        <p:nvSpPr>
+          <p:cNvPr id="16" name="TextBox 15"/>
+          <p:cNvSpPr txBox="1"/>
+          <p:nvPr/>
+        </p:nvSpPr>
+        <p:spPr>
+          <a:xfrm>
+            <a:off x="5760720" y="3383280"/>
+            <a:ext cx="1097280" cy="365760"/>
+          </a:xfrm>
+          <a:prstGeom prst="rect">
+            <a:avLst/>
+          </a:prstGeom>
+          <a:noFill/>
+        </p:spPr>
+        <p:txBody>
+          <a:bodyPr wrap="none">
+            <a:spAutoFit/>
+          </a:bodyPr>
+          <a:lstStyle/>
+          <a:p>
+            <a:pPr>
+              <a:defRPr sz="1000" i="1">
+                <a:solidFill>
+                  <a:srgbClr val="666666"/>
+                </a:solidFill>
+              </a:defRPr>
+            </a:pPr>
+            <a:r>
+              <a:t>state s'</a:t>
+            </a:r>
+          </a:p>
+        </p:txBody>
+      </p:sp>
+      <p:sp>
+        <p:nvSpPr>
+          <p:cNvPr id="17" name="TextBox 16"/>
+          <p:cNvSpPr txBox="1"/>
+          <p:nvPr/>
+        </p:nvSpPr>
+        <p:spPr>
+          <a:xfrm>
+            <a:off x="457200" y="5669280"/>
+            <a:ext cx="8229600" cy="457200"/>
+          </a:xfrm>
+          <a:prstGeom prst="rect">
+            <a:avLst/>
+          </a:prstGeom>
+          <a:noFill/>
+        </p:spPr>
+        <p:txBody>
+          <a:bodyPr wrap="none">
+            <a:spAutoFit/>
+          </a:bodyPr>
+          <a:lstStyle/>
+          <a:p>
+            <a:pPr algn="ctr">
+              <a:defRPr sz="1400">
+                <a:solidFill>
+                  <a:srgbClr val="1A1A2E"/>
+                </a:solidFill>
+                <a:latin typeface="Courier New"/>
+              </a:defRPr>
+            </a:pPr>
+            <a:r>
+              <a:t>Objective: J(θ) = E[Σ r(s,a)] → maximize expected reward</a:t>
+            </a:r>
+          </a:p>
+        </p:txBody>
+      </p:sp>
+    </p:spTree>
+  </p:cSld>
+  <p:clrMapOvr>
+    <a:masterClrMapping/>
+  </p:clrMapOvr>
+</p:sld>
+</file>
+
+<file path=ppt/slides/slide6.xml><?xml version="1.0" encoding="utf-8"?>
+<p:sld xmlns:a="http://schemas.openxmlformats.org/drawingml/2006/main" xmlns:p="http://schemas.openxmlformats.org/presentationml/2006/main" xmlns:r="http://schemas.openxmlformats.org/officeDocument/2006/relationships">
+  <p:cSld>
+    <p:spTree>
+      <p:nvGrpSpPr>
+        <p:cNvPr id="1" name=""/>
+        <p:cNvGrpSpPr/>
+        <p:nvPr/>
+      </p:nvGrpSpPr>
+      <p:grpSpPr/>
+      <p:sp>
+        <p:nvSpPr>
+          <p:cNvPr id="2" name="TextBox 1"/>
+          <p:cNvSpPr txBox="1"/>
+          <p:nvPr/>
+        </p:nvSpPr>
+        <p:spPr>
+          <a:xfrm>
+            <a:off x="457200" y="137160"/>
+            <a:ext cx="8229600" cy="640080"/>
+          </a:xfrm>
+          <a:prstGeom prst="rect">
+            <a:avLst/>
+          </a:prstGeom>
+          <a:noFill/>
+        </p:spPr>
+        <p:txBody>
+          <a:bodyPr wrap="none">
+            <a:spAutoFit/>
+          </a:bodyPr>
+          <a:lstStyle/>
+          <a:p>
+            <a:pPr>
+              <a:defRPr sz="2800" b="1">
+                <a:solidFill>
+                  <a:srgbClr val="1A1A2E"/>
+                </a:solidFill>
+              </a:defRPr>
+            </a:pPr>
+            <a:r>
+              <a:t>Knowledge Distillation: Teacher → Student</a:t>
+            </a:r>
+          </a:p>
+        </p:txBody>
+      </p:sp>
+      <p:sp>
+        <p:nvSpPr>
+          <p:cNvPr id="3" name="Rounded Rectangle 2"/>
+          <p:cNvSpPr/>
+          <p:nvPr/>
+        </p:nvSpPr>
+        <p:spPr>
+          <a:xfrm>
+            <a:off x="3200400" y="1188720"/>
+            <a:ext cx="2743200" cy="1097280"/>
+          </a:xfrm>
+          <a:prstGeom prst="roundRect">
+            <a:avLst/>
+          </a:prstGeom>
+          <a:solidFill>
+            <a:srgbClr val="6F42C1"/>
+          </a:solidFill>
+          <a:ln w="19050">
+            <a:solidFill>
+              <a:srgbClr val="333333"/>
+            </a:solidFill>
+          </a:ln>
+        </p:spPr>
+        <p:style>
+          <a:lnRef idx="1">
+            <a:schemeClr val="accent1"/>
+          </a:lnRef>
+          <a:fillRef idx="3">
+            <a:schemeClr val="accent1"/>
+          </a:fillRef>
+          <a:effectRef idx="2">
+            <a:schemeClr val="accent1"/>
+          </a:effectRef>
+          <a:fontRef idx="minor">
+            <a:schemeClr val="lt1"/>
+          </a:fontRef>
+        </p:style>
+        <p:txBody>
+          <a:bodyPr rtlCol="0" anchor="ctr" wrap="square"/>
+          <a:lstStyle/>
+          <a:p>
+            <a:pPr algn="ctr">
+              <a:defRPr sz="1300" b="1">
+                <a:solidFill>
+                  <a:srgbClr val="FFFFFF"/>
+                </a:solidFill>
+              </a:defRPr>
+            </a:pPr>
+            <a:r>
+              <a:t>Teacher Model</a:t>
+            </a:r>
+            <a:br/>
+            <a:r>
+              <a:t>(Large, Frozen)</a:t>
+            </a:r>
+          </a:p>
+        </p:txBody>
+      </p:sp>
+      <p:sp>
+        <p:nvSpPr>
+          <p:cNvPr id="4" name="Rounded Rectangle 3"/>
+          <p:cNvSpPr/>
+          <p:nvPr/>
+        </p:nvSpPr>
+        <p:spPr>
+          <a:xfrm>
+            <a:off x="3200400" y="4389120"/>
+            <a:ext cx="2743200" cy="1097280"/>
+          </a:xfrm>
+          <a:prstGeom prst="roundRect">
+            <a:avLst/>
+          </a:prstGeom>
+          <a:solidFill>
+            <a:srgbClr val="4169E1"/>
+          </a:solidFill>
+          <a:ln w="19050">
+            <a:solidFill>
+              <a:srgbClr val="333333"/>
+            </a:solidFill>
+          </a:ln>
+        </p:spPr>
+        <p:style>
+          <a:lnRef idx="1">
+            <a:schemeClr val="accent1"/>
+          </a:lnRef>
+          <a:fillRef idx="3">
+            <a:schemeClr val="accent1"/>
+          </a:fillRef>
+          <a:effectRef idx="2">
+            <a:schemeClr val="accent1"/>
+          </a:effectRef>
+          <a:fontRef idx="minor">
+            <a:schemeClr val="lt1"/>
+          </a:fontRef>
+        </p:style>
+        <p:txBody>
+          <a:bodyPr rtlCol="0" anchor="ctr" wrap="square"/>
+          <a:lstStyle/>
+          <a:p>
+            <a:pPr algn="ctr">
+              <a:defRPr sz="1300" b="1">
+                <a:solidFill>
+                  <a:srgbClr val="FFFFFF"/>
+                </a:solidFill>
+              </a:defRPr>
+            </a:pPr>
+            <a:r>
+              <a:t>Student Model</a:t>
+            </a:r>
+            <a:br/>
+            <a:r>
+              <a:t>(Small, Training)</a:t>
+            </a:r>
+          </a:p>
+        </p:txBody>
+      </p:sp>
+      <p:sp>
+        <p:nvSpPr>
+          <p:cNvPr id="5" name="Rounded Rectangle 4"/>
+          <p:cNvSpPr/>
+          <p:nvPr/>
+        </p:nvSpPr>
+        <p:spPr>
+          <a:xfrm>
+            <a:off x="274320" y="2743200"/>
+            <a:ext cx="1645920" cy="822960"/>
+          </a:xfrm>
+          <a:prstGeom prst="roundRect">
+            <a:avLst/>
+          </a:prstGeom>
+          <a:solidFill>
+            <a:srgbClr val="F0F0F0"/>
+          </a:solidFill>
+          <a:ln w="19050">
+            <a:solidFill>
+              <a:srgbClr val="333333"/>
+            </a:solidFill>
+          </a:ln>
+        </p:spPr>
+        <p:style>
+          <a:lnRef idx="1">
+            <a:schemeClr val="accent1"/>
+          </a:lnRef>
+          <a:fillRef idx="3">
+            <a:schemeClr val="accent1"/>
+          </a:fillRef>
+          <a:effectRef idx="2">
+            <a:schemeClr val="accent1"/>
+          </a:effectRef>
+          <a:fontRef idx="minor">
+            <a:schemeClr val="lt1"/>
+          </a:fontRef>
+        </p:style>
+        <p:txBody>
+          <a:bodyPr rtlCol="0" anchor="ctr" wrap="square"/>
+          <a:lstStyle/>
+          <a:p>
+            <a:pPr algn="ctr">
+              <a:defRPr sz="1200" b="1">
+                <a:solidFill>
+                  <a:srgbClr val="1A1A2E"/>
+                </a:solidFill>
+              </a:defRPr>
+            </a:pPr>
+            <a:r>
+              <a:t>Input x</a:t>
+            </a:r>
+          </a:p>
+        </p:txBody>
+      </p:sp>
+      <p:sp>
+        <p:nvSpPr>
+          <p:cNvPr id="6" name="Oval 5"/>
+          <p:cNvSpPr/>
+          <p:nvPr/>
+        </p:nvSpPr>
+        <p:spPr>
+          <a:xfrm>
+            <a:off x="3886200" y="2651760"/>
+            <a:ext cx="1371600" cy="1097280"/>
+          </a:xfrm>
+          <a:prstGeom prst="ellipse">
+            <a:avLst/>
+          </a:prstGeom>
+          <a:solidFill>
+            <a:srgbClr val="FF8C00"/>
+          </a:solidFill>
+          <a:ln>
+            <a:solidFill>
+              <a:srgbClr val="333333"/>
+            </a:solidFill>
+          </a:ln>
+        </p:spPr>
+        <p:style>
+          <a:lnRef idx="1">
+            <a:schemeClr val="accent1"/>
+          </a:lnRef>
+          <a:fillRef idx="3">
+            <a:schemeClr val="accent1"/>
+          </a:fillRef>
+          <a:effectRef idx="2">
+            <a:schemeClr val="accent1"/>
+          </a:effectRef>
+          <a:fontRef idx="minor">
+            <a:schemeClr val="lt1"/>
+          </a:fontRef>
+        </p:style>
+        <p:txBody>
+          <a:bodyPr rtlCol="0" anchor="ctr"/>
+          <a:lstStyle/>
+          <a:p>
+            <a:pPr algn="ctr">
+              <a:defRPr sz="1400" b="1">
+                <a:solidFill>
+                  <a:srgbClr val="FFFFFF"/>
+                </a:solidFill>
+              </a:defRPr>
+            </a:pPr>
+            <a:r>
+              <a:t>KL</a:t>
+            </a:r>
+            <a:br/>
+            <a:r>
+              <a:t>Loss</a:t>
+            </a:r>
+          </a:p>
+        </p:txBody>
+      </p:sp>
+      <p:sp>
+        <p:nvSpPr>
+          <p:cNvPr id="7" name="Rounded Rectangle 6"/>
+          <p:cNvSpPr/>
+          <p:nvPr/>
+        </p:nvSpPr>
+        <p:spPr>
+          <a:xfrm>
+            <a:off x="6858000" y="1463040"/>
+            <a:ext cx="1828800" cy="731520"/>
+          </a:xfrm>
+          <a:prstGeom prst="roundRect">
+            <a:avLst/>
+          </a:prstGeom>
+          <a:solidFill>
+            <a:srgbClr val="6F42C1"/>
+          </a:solidFill>
+          <a:ln w="19050">
+            <a:solidFill>
+              <a:srgbClr val="333333"/>
+            </a:solidFill>
+          </a:ln>
+        </p:spPr>
+        <p:style>
+          <a:lnRef idx="1">
+            <a:schemeClr val="accent1"/>
+          </a:lnRef>
+          <a:fillRef idx="3">
+            <a:schemeClr val="accent1"/>
+          </a:fillRef>
+          <a:effectRef idx="2">
+            <a:schemeClr val="accent1"/>
+          </a:effectRef>
+          <a:fontRef idx="minor">
+            <a:schemeClr val="lt1"/>
+          </a:fontRef>
+        </p:style>
+        <p:txBody>
+          <a:bodyPr rtlCol="0" anchor="ctr" wrap="square"/>
+          <a:lstStyle/>
+          <a:p>
+            <a:pPr algn="ctr">
+              <a:defRPr sz="1200" b="1">
+                <a:solidFill>
+                  <a:srgbClr val="FFFFFF"/>
+                </a:solidFill>
+              </a:defRPr>
+            </a:pPr>
+            <a:r>
+              <a:t>P_T(y|x)</a:t>
+            </a:r>
+          </a:p>
+        </p:txBody>
+      </p:sp>
+      <p:sp>
+        <p:nvSpPr>
+          <p:cNvPr id="8" name="Rounded Rectangle 7"/>
+          <p:cNvSpPr/>
+          <p:nvPr/>
+        </p:nvSpPr>
+        <p:spPr>
+          <a:xfrm>
+            <a:off x="6858000" y="4663440"/>
+            <a:ext cx="1828800" cy="731520"/>
+          </a:xfrm>
+          <a:prstGeom prst="roundRect">
+            <a:avLst/>
+          </a:prstGeom>
+          <a:solidFill>
+            <a:srgbClr val="4169E1"/>
+          </a:solidFill>
+          <a:ln w="19050">
+            <a:solidFill>
+              <a:srgbClr val="333333"/>
+            </a:solidFill>
+          </a:ln>
+        </p:spPr>
+        <p:style>
+          <a:lnRef idx="1">
+            <a:schemeClr val="accent1"/>
+          </a:lnRef>
+          <a:fillRef idx="3">
+            <a:schemeClr val="accent1"/>
+          </a:fillRef>
+          <a:effectRef idx="2">
+            <a:schemeClr val="accent1"/>
+          </a:effectRef>
+          <a:fontRef idx="minor">
+            <a:schemeClr val="lt1"/>
+          </a:fontRef>
+        </p:style>
+        <p:txBody>
+          <a:bodyPr rtlCol="0" anchor="ctr" wrap="square"/>
+          <a:lstStyle/>
+          <a:p>
+            <a:pPr algn="ctr">
+              <a:defRPr sz="1200" b="1">
+                <a:solidFill>
+                  <a:srgbClr val="FFFFFF"/>
+                </a:solidFill>
+              </a:defRPr>
+            </a:pPr>
+            <a:r>
+              <a:t>P_S(y|x)</a:t>
+            </a:r>
+          </a:p>
+        </p:txBody>
+      </p:sp>
+      <p:sp>
+        <p:nvSpPr>
+          <p:cNvPr id="9" name="Right Arrow 8"/>
+          <p:cNvSpPr/>
+          <p:nvPr/>
+        </p:nvSpPr>
+        <p:spPr>
+          <a:xfrm>
+            <a:off x="1920240" y="1645920"/>
+            <a:ext cx="1188720" cy="228600"/>
+          </a:xfrm>
+          <a:prstGeom prst="rightArrow">
+            <a:avLst/>
+          </a:prstGeom>
+          <a:solidFill>
+            <a:srgbClr val="666666"/>
+          </a:solidFill>
+          <a:ln>
+            <a:noFill/>
+          </a:ln>
+        </p:spPr>
+        <p:style>
+          <a:lnRef idx="1">
+            <a:schemeClr val="accent1"/>
+          </a:lnRef>
+          <a:fillRef idx="3">
+            <a:schemeClr val="accent1"/>
+          </a:fillRef>
+          <a:effectRef idx="2">
+            <a:schemeClr val="accent1"/>
+          </a:effectRef>
+          <a:fontRef idx="minor">
+            <a:schemeClr val="lt1"/>
+          </a:fontRef>
+        </p:style>
+        <p:txBody>
+          <a:bodyPr rtlCol="0" anchor="ctr"/>
+          <a:lstStyle/>
+          <a:p>
+            <a:pPr algn="ctr"/>
+          </a:p>
+        </p:txBody>
+      </p:sp>
+      <p:sp>
+        <p:nvSpPr>
+          <p:cNvPr id="10" name="Right Arrow 9"/>
+          <p:cNvSpPr/>
+          <p:nvPr/>
+        </p:nvSpPr>
+        <p:spPr>
+          <a:xfrm>
+            <a:off x="1920240" y="4800600"/>
+            <a:ext cx="1188720" cy="228600"/>
+          </a:xfrm>
+          <a:prstGeom prst="rightArrow">
+            <a:avLst/>
+          </a:prstGeom>
+          <a:solidFill>
+            <a:srgbClr val="666666"/>
+          </a:solidFill>
+          <a:ln>
+            <a:noFill/>
+          </a:ln>
+        </p:spPr>
+        <p:style>
+          <a:lnRef idx="1">
+            <a:schemeClr val="accent1"/>
+          </a:lnRef>
+          <a:fillRef idx="3">
+            <a:schemeClr val="accent1"/>
+          </a:fillRef>
+          <a:effectRef idx="2">
+            <a:schemeClr val="accent1"/>
+          </a:effectRef>
+          <a:fontRef idx="minor">
+            <a:schemeClr val="lt1"/>
+          </a:fontRef>
+        </p:style>
+        <p:txBody>
+          <a:bodyPr rtlCol="0" anchor="ctr"/>
+          <a:lstStyle/>
+          <a:p>
+            <a:pPr algn="ctr"/>
+          </a:p>
+        </p:txBody>
+      </p:sp>
+      <p:sp>
+        <p:nvSpPr>
+          <p:cNvPr id="11" name="Down Arrow 10"/>
+          <p:cNvSpPr/>
+          <p:nvPr/>
+        </p:nvSpPr>
+        <p:spPr>
+          <a:xfrm>
+            <a:off x="4434840" y="2331720"/>
+            <a:ext cx="228600" cy="274320"/>
+          </a:xfrm>
+          <a:prstGeom prst="downArrow">
+            <a:avLst/>
+          </a:prstGeom>
+          <a:solidFill>
+            <a:srgbClr val="666666"/>
+          </a:solidFill>
+          <a:ln>
+            <a:noFill/>
+          </a:ln>
+        </p:spPr>
+        <p:style>
+          <a:lnRef idx="1">
+            <a:schemeClr val="accent1"/>
+          </a:lnRef>
+          <a:fillRef idx="3">
+            <a:schemeClr val="accent1"/>
+          </a:fillRef>
+          <a:effectRef idx="2">
+            <a:schemeClr val="accent1"/>
+          </a:effectRef>
+          <a:fontRef idx="minor">
+            <a:schemeClr val="lt1"/>
+          </a:fontRef>
+        </p:style>
+        <p:txBody>
+          <a:bodyPr rtlCol="0" anchor="ctr"/>
+          <a:lstStyle/>
+          <a:p>
+            <a:pPr algn="ctr"/>
+          </a:p>
+        </p:txBody>
+      </p:sp>
+      <p:sp>
+        <p:nvSpPr>
+          <p:cNvPr id="12" name="Up Arrow 11"/>
+          <p:cNvSpPr/>
+          <p:nvPr/>
+        </p:nvSpPr>
+        <p:spPr>
+          <a:xfrm>
+            <a:off x="4434840" y="3794760"/>
+            <a:ext cx="228600" cy="548640"/>
+          </a:xfrm>
+          <a:prstGeom prst="upArrow">
+            <a:avLst/>
+          </a:prstGeom>
+          <a:solidFill>
+            <a:srgbClr val="666666"/>
+          </a:solidFill>
+          <a:ln>
+            <a:noFill/>
+          </a:ln>
+        </p:spPr>
+        <p:style>
+          <a:lnRef idx="1">
+            <a:schemeClr val="accent1"/>
+          </a:lnRef>
+          <a:fillRef idx="3">
+            <a:schemeClr val="accent1"/>
+          </a:fillRef>
+          <a:effectRef idx="2">
+            <a:schemeClr val="accent1"/>
+          </a:effectRef>
+          <a:fontRef idx="minor">
+            <a:schemeClr val="lt1"/>
+          </a:fontRef>
+        </p:style>
+        <p:txBody>
+          <a:bodyPr rtlCol="0" anchor="ctr"/>
+          <a:lstStyle/>
+          <a:p>
+            <a:pPr algn="ctr"/>
+          </a:p>
+        </p:txBody>
+      </p:sp>
+      <p:sp>
+        <p:nvSpPr>
+          <p:cNvPr id="13" name="Right Arrow 12"/>
+          <p:cNvSpPr/>
+          <p:nvPr/>
+        </p:nvSpPr>
+        <p:spPr>
+          <a:xfrm>
+            <a:off x="5943600" y="1691640"/>
+            <a:ext cx="822960" cy="228600"/>
+          </a:xfrm>
+          <a:prstGeom prst="rightArrow">
+            <a:avLst/>
+          </a:prstGeom>
+          <a:solidFill>
+            <a:srgbClr val="666666"/>
+          </a:solidFill>
+          <a:ln>
+            <a:noFill/>
+          </a:ln>
+        </p:spPr>
+        <p:style>
+          <a:lnRef idx="1">
+            <a:schemeClr val="accent1"/>
+          </a:lnRef>
+          <a:fillRef idx="3">
+            <a:schemeClr val="accent1"/>
+          </a:fillRef>
+          <a:effectRef idx="2">
+            <a:schemeClr val="accent1"/>
+          </a:effectRef>
+          <a:fontRef idx="minor">
+            <a:schemeClr val="lt1"/>
+          </a:fontRef>
+        </p:style>
+        <p:txBody>
+          <a:bodyPr rtlCol="0" anchor="ctr"/>
+          <a:lstStyle/>
+          <a:p>
+            <a:pPr algn="ctr"/>
+          </a:p>
+        </p:txBody>
+      </p:sp>
+      <p:sp>
+        <p:nvSpPr>
+          <p:cNvPr id="14" name="Right Arrow 13"/>
+          <p:cNvSpPr/>
+          <p:nvPr/>
+        </p:nvSpPr>
+        <p:spPr>
+          <a:xfrm>
+            <a:off x="5943600" y="4892040"/>
+            <a:ext cx="822960" cy="228600"/>
+          </a:xfrm>
+          <a:prstGeom prst="rightArrow">
+            <a:avLst/>
+          </a:prstGeom>
+          <a:solidFill>
+            <a:srgbClr val="666666"/>
+          </a:solidFill>
+          <a:ln>
+            <a:noFill/>
+          </a:ln>
+        </p:spPr>
+        <p:style>
+          <a:lnRef idx="1">
+            <a:schemeClr val="accent1"/>
+          </a:lnRef>
+          <a:fillRef idx="3">
+            <a:schemeClr val="accent1"/>
+          </a:fillRef>
+          <a:effectRef idx="2">
+            <a:schemeClr val="accent1"/>
+          </a:effectRef>
+          <a:fontRef idx="minor">
+            <a:schemeClr val="lt1"/>
+          </a:fontRef>
+        </p:style>
+        <p:txBody>
+          <a:bodyPr rtlCol="0" anchor="ctr"/>
+          <a:lstStyle/>
+          <a:p>
+            <a:pPr algn="ctr"/>
+          </a:p>
+        </p:txBody>
+      </p:sp>
+      <p:sp>
+        <p:nvSpPr>
+          <p:cNvPr id="15" name="TextBox 14"/>
+          <p:cNvSpPr txBox="1"/>
+          <p:nvPr/>
+        </p:nvSpPr>
+        <p:spPr>
+          <a:xfrm>
+            <a:off x="457200" y="5760720"/>
+            <a:ext cx="8229600" cy="457200"/>
+          </a:xfrm>
+          <a:prstGeom prst="rect">
+            <a:avLst/>
+          </a:prstGeom>
+          <a:noFill/>
+        </p:spPr>
+        <p:txBody>
+          <a:bodyPr wrap="none">
+            <a:spAutoFit/>
+          </a:bodyPr>
+          <a:lstStyle/>
+          <a:p>
+            <a:pPr algn="ctr">
+              <a:defRPr sz="1400">
+                <a:solidFill>
+                  <a:srgbClr val="1A1A2E"/>
+                </a:solidFill>
+                <a:latin typeface="Courier New"/>
+              </a:defRPr>
+            </a:pPr>
+            <a:r>
+              <a:t>Loss = KL(P_T || P_S) = Σ P_T(y) log(P_T(y)/P_S(y))</a:t>
+            </a:r>
+          </a:p>
+        </p:txBody>
+      </p:sp>
+    </p:spTree>
+  </p:cSld>
+  <p:clrMapOvr>
+    <a:masterClrMapping/>
+  </p:clrMapOvr>
+</p:sld>
+</file>
+
+<file path=ppt/slides/slide7.xml><?xml version="1.0" encoding="utf-8"?>
+<p:sld xmlns:a="http://schemas.openxmlformats.org/drawingml/2006/main" xmlns:p="http://schemas.openxmlformats.org/presentationml/2006/main" xmlns:r="http://schemas.openxmlformats.org/officeDocument/2006/relationships">
+  <p:cSld>
+    <p:spTree>
+      <p:nvGrpSpPr>
+        <p:cNvPr id="1" name=""/>
+        <p:cNvGrpSpPr/>
+        <p:nvPr/>
+      </p:nvGrpSpPr>
+      <p:grpSpPr/>
+      <p:sp>
+        <p:nvSpPr>
+          <p:cNvPr id="2" name="TextBox 1"/>
+          <p:cNvSpPr txBox="1"/>
+          <p:nvPr/>
+        </p:nvSpPr>
+        <p:spPr>
+          <a:xfrm>
+            <a:off x="457200" y="137160"/>
+            <a:ext cx="8229600" cy="640080"/>
+          </a:xfrm>
+          <a:prstGeom prst="rect">
+            <a:avLst/>
+          </a:prstGeom>
+          <a:noFill/>
+        </p:spPr>
+        <p:txBody>
+          <a:bodyPr wrap="none">
+            <a:spAutoFit/>
+          </a:bodyPr>
+          <a:lstStyle/>
+          <a:p>
+            <a:pPr>
+              <a:defRPr sz="2800" b="1">
+                <a:solidFill>
+                  <a:srgbClr val="1A1A2E"/>
+                </a:solidFill>
+              </a:defRPr>
+            </a:pPr>
+            <a:r>
+              <a:t>Pairwise Preference Learning</a:t>
+            </a:r>
+          </a:p>
+        </p:txBody>
+      </p:sp>
+      <p:sp>
+        <p:nvSpPr>
+          <p:cNvPr id="3" name="Rounded Rectangle 2"/>
+          <p:cNvSpPr/>
+          <p:nvPr/>
+        </p:nvSpPr>
+        <p:spPr>
+          <a:xfrm>
+            <a:off x="182880" y="2103120"/>
+            <a:ext cx="1645920" cy="914400"/>
+          </a:xfrm>
+          <a:prstGeom prst="roundRect">
+            <a:avLst/>
+          </a:prstGeom>
+          <a:solidFill>
+            <a:srgbClr val="F0F0F0"/>
+          </a:solidFill>
+          <a:ln w="19050">
+            <a:solidFill>
+              <a:srgbClr val="333333"/>
+            </a:solidFill>
+          </a:ln>
+        </p:spPr>
+        <p:style>
+          <a:lnRef idx="1">
+            <a:schemeClr val="accent1"/>
+          </a:lnRef>
+          <a:fillRef idx="3">
+            <a:schemeClr val="accent1"/>
+          </a:fillRef>
+          <a:effectRef idx="2">
+            <a:schemeClr val="accent1"/>
+          </a:effectRef>
+          <a:fontRef idx="minor">
+            <a:schemeClr val="lt1"/>
+          </a:fontRef>
+        </p:style>
+        <p:txBody>
+          <a:bodyPr rtlCol="0" anchor="ctr" wrap="square"/>
+          <a:lstStyle/>
+          <a:p>
+            <a:pPr algn="ctr">
+              <a:defRPr sz="1200" b="1">
+                <a:solidFill>
+                  <a:srgbClr val="1A1A2E"/>
+                </a:solidFill>
+              </a:defRPr>
+            </a:pPr>
+            <a:r>
+              <a:t>Prompt</a:t>
+            </a:r>
+          </a:p>
+        </p:txBody>
+      </p:sp>
+      <p:sp>
+        <p:nvSpPr>
+          <p:cNvPr id="4" name="Rounded Rectangle 3"/>
+          <p:cNvSpPr/>
+          <p:nvPr/>
+        </p:nvSpPr>
+        <p:spPr>
+          <a:xfrm>
+            <a:off x="2286000" y="2103120"/>
+            <a:ext cx="1463040" cy="914400"/>
+          </a:xfrm>
+          <a:prstGeom prst="roundRect">
+            <a:avLst/>
+          </a:prstGeom>
+          <a:solidFill>
+            <a:srgbClr val="4169E1"/>
+          </a:solidFill>
+          <a:ln w="19050">
+            <a:solidFill>
+              <a:srgbClr val="333333"/>
+            </a:solidFill>
+          </a:ln>
+        </p:spPr>
+        <p:style>
+          <a:lnRef idx="1">
+            <a:schemeClr val="accent1"/>
+          </a:lnRef>
+          <a:fillRef idx="3">
+            <a:schemeClr val="accent1"/>
+          </a:fillRef>
+          <a:effectRef idx="2">
+            <a:schemeClr val="accent1"/>
+          </a:effectRef>
+          <a:fontRef idx="minor">
+            <a:schemeClr val="lt1"/>
+          </a:fontRef>
+        </p:style>
+        <p:txBody>
+          <a:bodyPr rtlCol="0" anchor="ctr" wrap="square"/>
+          <a:lstStyle/>
+          <a:p>
+            <a:pPr algn="ctr">
+              <a:defRPr sz="1200" b="1">
+                <a:solidFill>
+                  <a:srgbClr val="FFFFFF"/>
+                </a:solidFill>
+              </a:defRPr>
+            </a:pPr>
+            <a:r>
+              <a:t>LLM</a:t>
+            </a:r>
+            <a:br/>
+            <a:r>
+              <a:t>×4</a:t>
+            </a:r>
+          </a:p>
+        </p:txBody>
+      </p:sp>
+      <p:sp>
+        <p:nvSpPr>
+          <p:cNvPr id="5" name="Rounded Rectangle 4"/>
+          <p:cNvSpPr/>
+          <p:nvPr/>
+        </p:nvSpPr>
+        <p:spPr>
+          <a:xfrm>
+            <a:off x="4206240" y="1188720"/>
+            <a:ext cx="1645920" cy="731520"/>
+          </a:xfrm>
+          <a:prstGeom prst="roundRect">
+            <a:avLst/>
+          </a:prstGeom>
+          <a:solidFill>
+            <a:srgbClr val="DC3545"/>
+          </a:solidFill>
+          <a:ln w="19050">
+            <a:solidFill>
+              <a:srgbClr val="333333"/>
+            </a:solidFill>
+          </a:ln>
+        </p:spPr>
+        <p:style>
+          <a:lnRef idx="1">
+            <a:schemeClr val="accent1"/>
+          </a:lnRef>
+          <a:fillRef idx="3">
+            <a:schemeClr val="accent1"/>
+          </a:fillRef>
+          <a:effectRef idx="2">
+            <a:schemeClr val="accent1"/>
+          </a:effectRef>
+          <a:fontRef idx="minor">
+            <a:schemeClr val="lt1"/>
+          </a:fontRef>
+        </p:style>
+        <p:txBody>
+          <a:bodyPr rtlCol="0" anchor="ctr" wrap="square"/>
+          <a:lstStyle/>
+          <a:p>
+            <a:pPr algn="ctr">
+              <a:defRPr sz="1100" b="1">
+                <a:solidFill>
+                  <a:srgbClr val="FFFFFF"/>
+                </a:solidFill>
+              </a:defRPr>
+            </a:pPr>
+            <a:r>
+              <a:t>A: 120 tok</a:t>
+            </a:r>
+          </a:p>
+        </p:txBody>
+      </p:sp>
+      <p:sp>
+        <p:nvSpPr>
+          <p:cNvPr id="6" name="Rounded Rectangle 5"/>
+          <p:cNvSpPr/>
+          <p:nvPr/>
+        </p:nvSpPr>
+        <p:spPr>
+          <a:xfrm>
+            <a:off x="4206240" y="2103120"/>
+            <a:ext cx="1645920" cy="731520"/>
+          </a:xfrm>
+          <a:prstGeom prst="roundRect">
+            <a:avLst/>
+          </a:prstGeom>
+          <a:solidFill>
+            <a:srgbClr val="FF8C00"/>
+          </a:solidFill>
+          <a:ln w="19050">
+            <a:solidFill>
+              <a:srgbClr val="333333"/>
+            </a:solidFill>
+          </a:ln>
+        </p:spPr>
+        <p:style>
+          <a:lnRef idx="1">
+            <a:schemeClr val="accent1"/>
+          </a:lnRef>
+          <a:fillRef idx="3">
+            <a:schemeClr val="accent1"/>
+          </a:fillRef>
+          <a:effectRef idx="2">
+            <a:schemeClr val="accent1"/>
+          </a:effectRef>
+          <a:fontRef idx="minor">
+            <a:schemeClr val="lt1"/>
+          </a:fontRef>
+        </p:style>
+        <p:txBody>
+          <a:bodyPr rtlCol="0" anchor="ctr" wrap="square"/>
+          <a:lstStyle/>
+          <a:p>
+            <a:pPr algn="ctr">
+              <a:defRPr sz="1100" b="1">
+                <a:solidFill>
+                  <a:srgbClr val="FFFFFF"/>
+                </a:solidFill>
+              </a:defRPr>
+            </a:pPr>
+            <a:r>
+              <a:t>B: 80 tok</a:t>
+            </a:r>
+          </a:p>
+        </p:txBody>
+      </p:sp>
+      <p:sp>
+        <p:nvSpPr>
+          <p:cNvPr id="7" name="Rounded Rectangle 6"/>
+          <p:cNvSpPr/>
+          <p:nvPr/>
+        </p:nvSpPr>
+        <p:spPr>
+          <a:xfrm>
+            <a:off x="4206240" y="3017520"/>
+            <a:ext cx="1645920" cy="731520"/>
+          </a:xfrm>
+          <a:prstGeom prst="roundRect">
+            <a:avLst/>
+          </a:prstGeom>
+          <a:solidFill>
+            <a:srgbClr val="90EE90"/>
+          </a:solidFill>
+          <a:ln w="19050">
+            <a:solidFill>
+              <a:srgbClr val="333333"/>
+            </a:solidFill>
+          </a:ln>
+        </p:spPr>
+        <p:style>
+          <a:lnRef idx="1">
+            <a:schemeClr val="accent1"/>
+          </a:lnRef>
+          <a:fillRef idx="3">
+            <a:schemeClr val="accent1"/>
+          </a:fillRef>
+          <a:effectRef idx="2">
+            <a:schemeClr val="accent1"/>
+          </a:effectRef>
+          <a:fontRef idx="minor">
+            <a:schemeClr val="lt1"/>
+          </a:fontRef>
+        </p:style>
+        <p:txBody>
+          <a:bodyPr rtlCol="0" anchor="ctr" wrap="square"/>
+          <a:lstStyle/>
+          <a:p>
+            <a:pPr algn="ctr">
+              <a:defRPr sz="1100" b="1">
+                <a:solidFill>
+                  <a:srgbClr val="1A1A2E"/>
+                </a:solidFill>
+              </a:defRPr>
+            </a:pPr>
+            <a:r>
+              <a:t>C: 50 tok</a:t>
+            </a:r>
+          </a:p>
+        </p:txBody>
+      </p:sp>
+      <p:sp>
+        <p:nvSpPr>
+          <p:cNvPr id="8" name="Rounded Rectangle 7"/>
+          <p:cNvSpPr/>
+          <p:nvPr/>
+        </p:nvSpPr>
+        <p:spPr>
+          <a:xfrm>
+            <a:off x="4206240" y="3931920"/>
+            <a:ext cx="1645920" cy="731520"/>
+          </a:xfrm>
+          <a:prstGeom prst="roundRect">
+            <a:avLst/>
+          </a:prstGeom>
+          <a:solidFill>
+            <a:srgbClr val="28A745"/>
+          </a:solidFill>
+          <a:ln w="19050">
+            <a:solidFill>
+              <a:srgbClr val="333333"/>
+            </a:solidFill>
+          </a:ln>
+        </p:spPr>
+        <p:style>
+          <a:lnRef idx="1">
+            <a:schemeClr val="accent1"/>
+          </a:lnRef>
+          <a:fillRef idx="3">
+            <a:schemeClr val="accent1"/>
+          </a:fillRef>
+          <a:effectRef idx="2">
+            <a:schemeClr val="accent1"/>
+          </a:effectRef>
+          <a:fontRef idx="minor">
+            <a:schemeClr val="lt1"/>
+          </a:fontRef>
+        </p:style>
+        <p:txBody>
+          <a:bodyPr rtlCol="0" anchor="ctr" wrap="square"/>
+          <a:lstStyle/>
+          <a:p>
+            <a:pPr algn="ctr">
+              <a:defRPr sz="1100" b="1">
+                <a:solidFill>
+                  <a:srgbClr val="FFFFFF"/>
+                </a:solidFill>
+              </a:defRPr>
+            </a:pPr>
+            <a:r>
+              <a:t>D: 35 tok</a:t>
+            </a:r>
+          </a:p>
+        </p:txBody>
+      </p:sp>
+      <p:sp>
+        <p:nvSpPr>
+          <p:cNvPr id="9" name="Oval 8"/>
+          <p:cNvSpPr/>
+          <p:nvPr/>
+        </p:nvSpPr>
+        <p:spPr>
+          <a:xfrm>
+            <a:off x="6400800" y="2286000"/>
+            <a:ext cx="1280160" cy="1097280"/>
+          </a:xfrm>
+          <a:prstGeom prst="ellipse">
+            <a:avLst/>
+          </a:prstGeom>
+          <a:solidFill>
+            <a:srgbClr val="6F42C1"/>
+          </a:solidFill>
+        </p:spPr>
+        <p:style>
+          <a:lnRef idx="1">
+            <a:schemeClr val="accent1"/>
+          </a:lnRef>
+          <a:fillRef idx="3">
+            <a:schemeClr val="accent1"/>
+          </a:fillRef>
+          <a:effectRef idx="2">
+            <a:schemeClr val="accent1"/>
+          </a:effectRef>
+          <a:fontRef idx="minor">
+            <a:schemeClr val="lt1"/>
+          </a:fontRef>
+        </p:style>
+        <p:txBody>
+          <a:bodyPr rtlCol="0" anchor="ctr"/>
+          <a:lstStyle/>
+          <a:p>
+            <a:pPr algn="ctr">
+              <a:defRPr sz="1100" b="1">
+                <a:solidFill>
+                  <a:srgbClr val="FFFFFF"/>
+                </a:solidFill>
+              </a:defRPr>
+            </a:pPr>
+            <a:r>
+              <a:t>Compare</a:t>
+            </a:r>
+            <a:br/>
+            <a:r>
+              <a:t>Pairs</a:t>
+            </a:r>
+          </a:p>
+        </p:txBody>
+      </p:sp>
+      <p:sp>
+        <p:nvSpPr>
+          <p:cNvPr id="10" name="Rounded Rectangle 9"/>
+          <p:cNvSpPr/>
+          <p:nvPr/>
+        </p:nvSpPr>
+        <p:spPr>
+          <a:xfrm>
+            <a:off x="7955279" y="2286000"/>
+            <a:ext cx="1005840" cy="1097280"/>
+          </a:xfrm>
+          <a:prstGeom prst="roundRect">
+            <a:avLst/>
+          </a:prstGeom>
+          <a:solidFill>
+            <a:srgbClr val="28A745"/>
+          </a:solidFill>
+          <a:ln w="19050">
+            <a:solidFill>
+              <a:srgbClr val="333333"/>
+            </a:solidFill>
+          </a:ln>
+        </p:spPr>
+        <p:style>
+          <a:lnRef idx="1">
+            <a:schemeClr val="accent1"/>
+          </a:lnRef>
+          <a:fillRef idx="3">
+            <a:schemeClr val="accent1"/>
+          </a:fillRef>
+          <a:effectRef idx="2">
+            <a:schemeClr val="accent1"/>
+          </a:effectRef>
+          <a:fontRef idx="minor">
+            <a:schemeClr val="lt1"/>
+          </a:fontRef>
+        </p:style>
+        <p:txBody>
+          <a:bodyPr rtlCol="0" anchor="ctr" wrap="square"/>
+          <a:lstStyle/>
+          <a:p>
+            <a:pPr algn="ctr">
+              <a:defRPr sz="1200" b="1">
+                <a:solidFill>
+                  <a:srgbClr val="FFFFFF"/>
+                </a:solidFill>
+              </a:defRPr>
+            </a:pPr>
+            <a:r>
+              <a:t>Winner</a:t>
+            </a:r>
+            <a:br/>
+            <a:r>
+              <a:t>→ D</a:t>
+            </a:r>
+          </a:p>
+        </p:txBody>
+      </p:sp>
+      <p:sp>
+        <p:nvSpPr>
+          <p:cNvPr id="11" name="Right Arrow 10"/>
+          <p:cNvSpPr/>
+          <p:nvPr/>
+        </p:nvSpPr>
+        <p:spPr>
+          <a:xfrm>
+            <a:off x="1828800" y="2423160"/>
+            <a:ext cx="365760" cy="228600"/>
+          </a:xfrm>
+          <a:prstGeom prst="rightArrow">
+            <a:avLst/>
+          </a:prstGeom>
+          <a:solidFill>
+            <a:srgbClr val="666666"/>
+          </a:solidFill>
+          <a:ln>
+            <a:noFill/>
+          </a:ln>
+        </p:spPr>
+        <p:style>
+          <a:lnRef idx="1">
+            <a:schemeClr val="accent1"/>
+          </a:lnRef>
+          <a:fillRef idx="3">
+            <a:schemeClr val="accent1"/>
+          </a:fillRef>
+          <a:effectRef idx="2">
+            <a:schemeClr val="accent1"/>
+          </a:effectRef>
+          <a:fontRef idx="minor">
+            <a:schemeClr val="lt1"/>
+          </a:fontRef>
+        </p:style>
+        <p:txBody>
+          <a:bodyPr rtlCol="0" anchor="ctr"/>
+          <a:lstStyle/>
+          <a:p>
+            <a:pPr algn="ctr"/>
+          </a:p>
+        </p:txBody>
+      </p:sp>
+      <p:sp>
+        <p:nvSpPr>
+          <p:cNvPr id="12" name="Right Arrow 11"/>
+          <p:cNvSpPr/>
+          <p:nvPr/>
+        </p:nvSpPr>
+        <p:spPr>
+          <a:xfrm>
+            <a:off x="3749039" y="2423160"/>
+            <a:ext cx="365760" cy="228600"/>
+          </a:xfrm>
+          <a:prstGeom prst="rightArrow">
+            <a:avLst/>
+          </a:prstGeom>
+          <a:solidFill>
+            <a:srgbClr val="666666"/>
+          </a:solidFill>
+          <a:ln>
+            <a:noFill/>
+          </a:ln>
+        </p:spPr>
+        <p:style>
+          <a:lnRef idx="1">
+            <a:schemeClr val="accent1"/>
+          </a:lnRef>
+          <a:fillRef idx="3">
+            <a:schemeClr val="accent1"/>
+          </a:fillRef>
+          <a:effectRef idx="2">
+            <a:schemeClr val="accent1"/>
+          </a:effectRef>
+          <a:fontRef idx="minor">
+            <a:schemeClr val="lt1"/>
+          </a:fontRef>
+        </p:style>
+        <p:txBody>
+          <a:bodyPr rtlCol="0" anchor="ctr"/>
+          <a:lstStyle/>
+          <a:p>
+            <a:pPr algn="ctr"/>
+          </a:p>
+        </p:txBody>
+      </p:sp>
+      <p:sp>
+        <p:nvSpPr>
+          <p:cNvPr id="13" name="Right Arrow 12"/>
+          <p:cNvSpPr/>
+          <p:nvPr/>
+        </p:nvSpPr>
+        <p:spPr>
+          <a:xfrm>
+            <a:off x="5852160" y="2697480"/>
+            <a:ext cx="457200" cy="228600"/>
+          </a:xfrm>
+          <a:prstGeom prst="rightArrow">
+            <a:avLst/>
+          </a:prstGeom>
+          <a:solidFill>
+            <a:srgbClr val="666666"/>
+          </a:solidFill>
+          <a:ln>
+            <a:noFill/>
+          </a:ln>
+        </p:spPr>
+        <p:style>
+          <a:lnRef idx="1">
+            <a:schemeClr val="accent1"/>
+          </a:lnRef>
+          <a:fillRef idx="3">
+            <a:schemeClr val="accent1"/>
+          </a:fillRef>
+          <a:effectRef idx="2">
+            <a:schemeClr val="accent1"/>
+          </a:effectRef>
+          <a:fontRef idx="minor">
+            <a:schemeClr val="lt1"/>
+          </a:fontRef>
+        </p:style>
+        <p:txBody>
+          <a:bodyPr rtlCol="0" anchor="ctr"/>
+          <a:lstStyle/>
+          <a:p>
+            <a:pPr algn="ctr"/>
+          </a:p>
+        </p:txBody>
+      </p:sp>
+      <p:sp>
+        <p:nvSpPr>
+          <p:cNvPr id="14" name="Right Arrow 13"/>
+          <p:cNvSpPr/>
+          <p:nvPr/>
+        </p:nvSpPr>
+        <p:spPr>
+          <a:xfrm>
+            <a:off x="7680960" y="2697480"/>
+            <a:ext cx="228600" cy="228600"/>
+          </a:xfrm>
+          <a:prstGeom prst="rightArrow">
+            <a:avLst/>
+          </a:prstGeom>
+          <a:solidFill>
+            <a:srgbClr val="666666"/>
+          </a:solidFill>
+          <a:ln>
+            <a:noFill/>
+          </a:ln>
+        </p:spPr>
+        <p:style>
+          <a:lnRef idx="1">
+            <a:schemeClr val="accent1"/>
+          </a:lnRef>
+          <a:fillRef idx="3">
+            <a:schemeClr val="accent1"/>
+          </a:fillRef>
+          <a:effectRef idx="2">
+            <a:schemeClr val="accent1"/>
+          </a:effectRef>
+          <a:fontRef idx="minor">
+            <a:schemeClr val="lt1"/>
+          </a:fontRef>
+        </p:style>
+        <p:txBody>
+          <a:bodyPr rtlCol="0" anchor="ctr"/>
+          <a:lstStyle/>
+          <a:p>
+            <a:pPr algn="ctr"/>
+          </a:p>
+        </p:txBody>
+      </p:sp>
+      <p:sp>
+        <p:nvSpPr>
+          <p:cNvPr id="15" name="TextBox 14"/>
+          <p:cNvSpPr txBox="1"/>
+          <p:nvPr/>
+        </p:nvSpPr>
+        <p:spPr>
+          <a:xfrm>
+            <a:off x="5943600" y="3931920"/>
+            <a:ext cx="731520" cy="274320"/>
+          </a:xfrm>
+          <a:prstGeom prst="rect">
+            <a:avLst/>
+          </a:prstGeom>
+          <a:noFill/>
+        </p:spPr>
+        <p:txBody>
+          <a:bodyPr wrap="none">
+            <a:spAutoFit/>
+          </a:bodyPr>
+          <a:lstStyle/>
+          <a:p>
+            <a:pPr>
+              <a:defRPr sz="1000" b="1">
+                <a:solidFill>
+                  <a:srgbClr val="28A745"/>
+                </a:solidFill>
+              </a:defRPr>
+            </a:pPr>
+            <a:r>
+              <a:t>✓ Win</a:t>
+            </a:r>
+          </a:p>
+        </p:txBody>
+      </p:sp>
+      <p:sp>
+        <p:nvSpPr>
+          <p:cNvPr id="16" name="TextBox 15"/>
+          <p:cNvSpPr txBox="1"/>
+          <p:nvPr/>
+        </p:nvSpPr>
+        <p:spPr>
+          <a:xfrm>
+            <a:off x="5943600" y="1188720"/>
+            <a:ext cx="731520" cy="274320"/>
+          </a:xfrm>
+          <a:prstGeom prst="rect">
+            <a:avLst/>
+          </a:prstGeom>
+          <a:noFill/>
+        </p:spPr>
+        <p:txBody>
+          <a:bodyPr wrap="none">
+            <a:spAutoFit/>
+          </a:bodyPr>
+          <a:lstStyle/>
+          <a:p>
+            <a:pPr>
+              <a:defRPr sz="1000" b="1">
+                <a:solidFill>
+                  <a:srgbClr val="DC3545"/>
+                </a:solidFill>
+              </a:defRPr>
+            </a:pPr>
+            <a:r>
+              <a:t>✗ Lose</a:t>
+            </a:r>
+          </a:p>
+        </p:txBody>
+      </p:sp>
+      <p:sp>
+        <p:nvSpPr>
+          <p:cNvPr id="17" name="TextBox 16"/>
+          <p:cNvSpPr txBox="1"/>
+          <p:nvPr/>
+        </p:nvSpPr>
+        <p:spPr>
+          <a:xfrm>
+            <a:off x="274320" y="5029200"/>
+            <a:ext cx="8595360" cy="822960"/>
+          </a:xfrm>
+          <a:prstGeom prst="rect">
+            <a:avLst/>
+          </a:prstGeom>
+          <a:noFill/>
+        </p:spPr>
+        <p:txBody>
+          <a:bodyPr wrap="none">
+            <a:spAutoFit/>
+          </a:bodyPr>
+          <a:lstStyle/>
+          <a:p>
+            <a:pPr algn="ctr">
+              <a:defRPr sz="1400">
+                <a:solidFill>
+                  <a:srgbClr val="1A1A2E"/>
+                </a:solidFill>
+                <a:latin typeface="Courier New"/>
+              </a:defRPr>
+            </a:pPr>
+            <a:r>
+              <a:t>reward = (wins - losses) / comparisons + format_bonus</a:t>
+            </a:r>
+          </a:p>
+          <a:p>
+            <a:pPr algn="ctr">
+              <a:defRPr sz="1200">
+                <a:solidFill>
+                  <a:srgbClr val="666666"/>
+                </a:solidFill>
+              </a:defRPr>
+            </a:pPr>
+            <a:r>
+              <a:t>Shorter responses beat longer ones → model learns conciseness</a:t>
+            </a:r>
+          </a:p>
+        </p:txBody>
+      </p:sp>
+    </p:spTree>
+  </p:cSld>
+  <p:clrMapOvr>
+    <a:masterClrMapping/>
+  </p:clrMapOvr>
+</p:sld>
+</file>
+
+<file path=ppt/slides/slide8.xml><?xml version="1.0" encoding="utf-8"?>
+<p:sld xmlns:a="http://schemas.openxmlformats.org/drawingml/2006/main" xmlns:p="http://schemas.openxmlformats.org/presentationml/2006/main" xmlns:r="http://schemas.openxmlformats.org/officeDocument/2006/relationships">
+  <p:cSld>
+    <p:spTree>
+      <p:nvGrpSpPr>
+        <p:cNvPr id="1" name=""/>
+        <p:cNvGrpSpPr/>
+        <p:nvPr/>
+      </p:nvGrpSpPr>
+      <p:grpSpPr/>
+      <p:sp>
+        <p:nvSpPr>
+          <p:cNvPr id="2" name="TextBox 1"/>
+          <p:cNvSpPr txBox="1"/>
+          <p:nvPr/>
+        </p:nvSpPr>
+        <p:spPr>
+          <a:xfrm>
+            <a:off x="457200" y="274320"/>
+            <a:ext cx="8229600" cy="731520"/>
+          </a:xfrm>
+          <a:prstGeom prst="rect">
+            <a:avLst/>
+          </a:prstGeom>
+          <a:noFill/>
+        </p:spPr>
+        <p:txBody>
+          <a:bodyPr wrap="none">
+            <a:spAutoFit/>
+          </a:bodyPr>
+          <a:lstStyle/>
+          <a:p>
+            <a:pPr>
+              <a:defRPr sz="2800" b="1">
+                <a:solidFill>
+                  <a:srgbClr val="1A1A2E"/>
+                </a:solidFill>
+              </a:defRPr>
+            </a:pPr>
+            <a:r>
+              <a:t>Experiments Conducted</a:t>
             </a:r>
           </a:p>
         </p:txBody>
@@ -4104,8 +7833,8 @@
           <p:nvPr/>
         </p:nvGraphicFramePr>
         <p:xfrm>
-          <a:off x="457200" y="1188720"/>
-          <a:ext cx="8229600" cy="2743200"/>
+          <a:off x="274320" y="1097280"/>
+          <a:ext cx="8595360" cy="3200400"/>
         </p:xfrm>
         <a:graphic>
           <a:graphicData uri="http://schemas.openxmlformats.org/drawingml/2006/table">
@@ -4114,10 +7843,11 @@
                 <a:tableStyleId>{5C22544A-7EE6-4342-B048-85BDC9FD1C3A}</a:tableStyleId>
               </a:tblPr>
               <a:tblGrid>
-                <a:gridCol w="2057400"/>
-                <a:gridCol w="2057400"/>
-                <a:gridCol w="2057400"/>
-                <a:gridCol w="2057400"/>
+                <a:gridCol w="1719072"/>
+                <a:gridCol w="1719072"/>
+                <a:gridCol w="1719072"/>
+                <a:gridCol w="1719072"/>
+                <a:gridCol w="1719072"/>
               </a:tblGrid>
               <a:tr h="457200">
                 <a:tc>
@@ -4126,14 +7856,18 @@
                     <a:lstStyle/>
                     <a:p>
                       <a:pPr>
-                        <a:defRPr b="1" sz="1400"/>
+                        <a:defRPr b="1" sz="1200"/>
                       </a:pPr>
                       <a:r>
                         <a:t>Recipe</a:t>
                       </a:r>
                     </a:p>
                   </a:txBody>
-                  <a:tcPr/>
+                  <a:tcPr>
+                    <a:solidFill>
+                      <a:srgbClr val="4169E1"/>
+                    </a:solidFill>
+                  </a:tcPr>
                 </a:tc>
                 <a:tc>
                   <a:txBody>
@@ -4141,14 +7875,18 @@
                     <a:lstStyle/>
                     <a:p>
                       <a:pPr>
-                        <a:defRPr b="1" sz="1400"/>
+                        <a:defRPr b="1" sz="1200"/>
                       </a:pPr>
                       <a:r>
                         <a:t>Task</a:t>
                       </a:r>
                     </a:p>
                   </a:txBody>
-                  <a:tcPr/>
+                  <a:tcPr>
+                    <a:solidFill>
+                      <a:srgbClr val="4169E1"/>
+                    </a:solidFill>
+                  </a:tcPr>
                 </a:tc>
                 <a:tc>
                   <a:txBody>
@@ -4156,14 +7894,18 @@
                     <a:lstStyle/>
                     <a:p>
                       <a:pPr>
-                        <a:defRPr b="1" sz="1400"/>
+                        <a:defRPr b="1" sz="1200"/>
                       </a:pPr>
                       <a:r>
                         <a:t>Model</a:t>
                       </a:r>
                     </a:p>
                   </a:txBody>
-                  <a:tcPr/>
+                  <a:tcPr>
+                    <a:solidFill>
+                      <a:srgbClr val="4169E1"/>
+                    </a:solidFill>
+                  </a:tcPr>
                 </a:tc>
                 <a:tc>
                   <a:txBody>
@@ -4171,14 +7913,37 @@
                     <a:lstStyle/>
                     <a:p>
                       <a:pPr>
-                        <a:defRPr b="1" sz="1400"/>
+                        <a:defRPr b="1" sz="1200"/>
                       </a:pPr>
                       <a:r>
-                        <a:t>Key Result</a:t>
+                        <a:t>Status</a:t>
                       </a:r>
                     </a:p>
                   </a:txBody>
-                  <a:tcPr/>
+                  <a:tcPr>
+                    <a:solidFill>
+                      <a:srgbClr val="4169E1"/>
+                    </a:solidFill>
+                  </a:tcPr>
+                </a:tc>
+                <a:tc>
+                  <a:txBody>
+                    <a:bodyPr/>
+                    <a:lstStyle/>
+                    <a:p>
+                      <a:pPr>
+                        <a:defRPr b="1" sz="1200"/>
+                      </a:pPr>
+                      <a:r>
+                        <a:t>Result</a:t>
+                      </a:r>
+                    </a:p>
+                  </a:txBody>
+                  <a:tcPr>
+                    <a:solidFill>
+                      <a:srgbClr val="4169E1"/>
+                    </a:solidFill>
+                  </a:tcPr>
                 </a:tc>
               </a:tr>
               <a:tr h="457200">
@@ -4188,7 +7953,7 @@
                     <a:lstStyle/>
                     <a:p>
                       <a:pPr>
-                        <a:defRPr sz="1200"/>
+                        <a:defRPr sz="1100"/>
                       </a:pPr>
                       <a:r>
                         <a:t>Math RL</a:t>
@@ -4203,7 +7968,7 @@
                     <a:lstStyle/>
                     <a:p>
                       <a:pPr>
-                        <a:defRPr sz="1200"/>
+                        <a:defRPr sz="1100"/>
                       </a:pPr>
                       <a:r>
                         <a:t>Arithmetic</a:t>
@@ -4218,7 +7983,7 @@
                     <a:lstStyle/>
                     <a:p>
                       <a:pPr>
-                        <a:defRPr sz="1200"/>
+                        <a:defRPr sz="1100"/>
                       </a:pPr>
                       <a:r>
                         <a:t>Llama-3.2-1B</a:t>
@@ -4233,10 +7998,25 @@
                     <a:lstStyle/>
                     <a:p>
                       <a:pPr>
-                        <a:defRPr sz="1200"/>
+                        <a:defRPr sz="1100"/>
                       </a:pPr>
                       <a:r>
-                        <a:t>0.67 → 1.0 reward</a:t>
+                        <a:t>✓ Complete</a:t>
+                      </a:r>
+                    </a:p>
+                  </a:txBody>
+                  <a:tcPr/>
+                </a:tc>
+                <a:tc>
+                  <a:txBody>
+                    <a:bodyPr/>
+                    <a:lstStyle/>
+                    <a:p>
+                      <a:pPr>
+                        <a:defRPr sz="1100"/>
+                      </a:pPr>
+                      <a:r>
+                        <a:t>100% accuracy</a:t>
                       </a:r>
                     </a:p>
                   </a:txBody>
@@ -4250,7 +8030,7 @@
                     <a:lstStyle/>
                     <a:p>
                       <a:pPr>
-                        <a:defRPr sz="1200"/>
+                        <a:defRPr sz="1100"/>
                       </a:pPr>
                       <a:r>
                         <a:t>Chat SL</a:t>
@@ -4265,7 +8045,7 @@
                     <a:lstStyle/>
                     <a:p>
                       <a:pPr>
-                        <a:defRPr sz="1200"/>
+                        <a:defRPr sz="1100"/>
                       </a:pPr>
                       <a:r>
                         <a:t>Conversation</a:t>
@@ -4280,7 +8060,7 @@
                     <a:lstStyle/>
                     <a:p>
                       <a:pPr>
-                        <a:defRPr sz="1200"/>
+                        <a:defRPr sz="1100"/>
                       </a:pPr>
                       <a:r>
                         <a:t>Llama-3.2-1B</a:t>
@@ -4295,10 +8075,25 @@
                     <a:lstStyle/>
                     <a:p>
                       <a:pPr>
-                        <a:defRPr sz="1200"/>
+                        <a:defRPr sz="1100"/>
                       </a:pPr>
                       <a:r>
-                        <a:t>NLL decreasing</a:t>
+                        <a:t>✓ Running</a:t>
+                      </a:r>
+                    </a:p>
+                  </a:txBody>
+                  <a:tcPr/>
+                </a:tc>
+                <a:tc>
+                  <a:txBody>
+                    <a:bodyPr/>
+                    <a:lstStyle/>
+                    <a:p>
+                      <a:pPr>
+                        <a:defRPr sz="1100"/>
+                      </a:pPr>
+                      <a:r>
+                        <a:t>NLL: 2.5→1.8</a:t>
                       </a:r>
                     </a:p>
                   </a:txBody>
@@ -4312,7 +8107,7 @@
                     <a:lstStyle/>
                     <a:p>
                       <a:pPr>
-                        <a:defRPr sz="1200"/>
+                        <a:defRPr sz="1100"/>
                       </a:pPr>
                       <a:r>
                         <a:t>Preference</a:t>
@@ -4327,10 +8122,10 @@
                     <a:lstStyle/>
                     <a:p>
                       <a:pPr>
-                        <a:defRPr sz="1200"/>
+                        <a:defRPr sz="1100"/>
                       </a:pPr>
                       <a:r>
-                        <a:t>Shorter responses</a:t>
+                        <a:t>Shorter</a:t>
                       </a:r>
                     </a:p>
                   </a:txBody>
@@ -4342,7 +8137,7 @@
                     <a:lstStyle/>
                     <a:p>
                       <a:pPr>
-                        <a:defRPr sz="1200"/>
+                        <a:defRPr sz="1100"/>
                       </a:pPr>
                       <a:r>
                         <a:t>Qwen-0.6B</a:t>
@@ -4357,10 +8152,25 @@
                     <a:lstStyle/>
                     <a:p>
                       <a:pPr>
-                        <a:defRPr sz="1200"/>
+                        <a:defRPr sz="1100"/>
                       </a:pPr>
                       <a:r>
-                        <a:t>Learning conciseness</a:t>
+                        <a:t>✓ Running</a:t>
+                      </a:r>
+                    </a:p>
+                  </a:txBody>
+                  <a:tcPr/>
+                </a:tc>
+                <a:tc>
+                  <a:txBody>
+                    <a:bodyPr/>
+                    <a:lstStyle/>
+                    <a:p>
+                      <a:pPr>
+                        <a:defRPr sz="1100"/>
+                      </a:pPr>
+                      <a:r>
+                        <a:t>37% done</a:t>
                       </a:r>
                     </a:p>
                   </a:txBody>
@@ -4374,10 +8184,10 @@
                     <a:lstStyle/>
                     <a:p>
                       <a:pPr>
-                        <a:defRPr sz="1200"/>
+                        <a:defRPr sz="1100"/>
                       </a:pPr>
                       <a:r>
-                        <a:t>Distillation</a:t>
+                        <a:t>Distill (Off)</a:t>
                       </a:r>
                     </a:p>
                   </a:txBody>
@@ -4389,10 +8199,10 @@
                     <a:lstStyle/>
                     <a:p>
                       <a:pPr>
-                        <a:defRPr sz="1200"/>
+                        <a:defRPr sz="1100"/>
                       </a:pPr>
                       <a:r>
-                        <a:t>Reasoning transfer</a:t>
+                        <a:t>Reasoning</a:t>
                       </a:r>
                     </a:p>
                   </a:txBody>
@@ -4404,7 +8214,7 @@
                     <a:lstStyle/>
                     <a:p>
                       <a:pPr>
-                        <a:defRPr sz="1200"/>
+                        <a:defRPr sz="1100"/>
                       </a:pPr>
                       <a:r>
                         <a:t>Llama-3.2-1B</a:t>
@@ -4419,10 +8229,25 @@
                     <a:lstStyle/>
                     <a:p>
                       <a:pPr>
-                        <a:defRPr sz="1200"/>
+                        <a:defRPr sz="1100"/>
                       </a:pPr>
                       <a:r>
-                        <a:t>KL minimization</a:t>
+                        <a:t>✓ Running</a:t>
+                      </a:r>
+                    </a:p>
+                  </a:txBody>
+                  <a:tcPr/>
+                </a:tc>
+                <a:tc>
+                  <a:txBody>
+                    <a:bodyPr/>
+                    <a:lstStyle/>
+                    <a:p>
+                      <a:pPr>
+                        <a:defRPr sz="1100"/>
+                      </a:pPr>
+                      <a:r>
+                        <a:t>SFT active</a:t>
                       </a:r>
                     </a:p>
                   </a:txBody>
@@ -4436,10 +8261,10 @@
                     <a:lstStyle/>
                     <a:p>
                       <a:pPr>
-                        <a:defRPr sz="1200"/>
+                        <a:defRPr sz="1100"/>
                       </a:pPr>
                       <a:r>
-                        <a:t>GSM8K RL</a:t>
+                        <a:t>Distill (On)</a:t>
                       </a:r>
                     </a:p>
                   </a:txBody>
@@ -4451,10 +8276,10 @@
                     <a:lstStyle/>
                     <a:p>
                       <a:pPr>
-                        <a:defRPr sz="1200"/>
+                        <a:defRPr sz="1100"/>
                       </a:pPr>
                       <a:r>
-                        <a:t>Word problems</a:t>
+                        <a:t>KL Match</a:t>
                       </a:r>
                     </a:p>
                   </a:txBody>
@@ -4466,7 +8291,7 @@
                     <a:lstStyle/>
                     <a:p>
                       <a:pPr>
-                        <a:defRPr sz="1200"/>
+                        <a:defRPr sz="1100"/>
                       </a:pPr>
                       <a:r>
                         <a:t>Llama-3.2-1B</a:t>
@@ -4481,10 +8306,102 @@
                     <a:lstStyle/>
                     <a:p>
                       <a:pPr>
-                        <a:defRPr sz="1200"/>
+                        <a:defRPr sz="1100"/>
                       </a:pPr>
                       <a:r>
-                        <a:t>Multi-step reasoning</a:t>
+                        <a:t>✓ Running</a:t>
+                      </a:r>
+                    </a:p>
+                  </a:txBody>
+                  <a:tcPr/>
+                </a:tc>
+                <a:tc>
+                  <a:txBody>
+                    <a:bodyPr/>
+                    <a:lstStyle/>
+                    <a:p>
+                      <a:pPr>
+                        <a:defRPr sz="1100"/>
+                      </a:pPr>
+                      <a:r>
+                        <a:t>KL: 2.88</a:t>
+                      </a:r>
+                    </a:p>
+                  </a:txBody>
+                  <a:tcPr/>
+                </a:tc>
+              </a:tr>
+              <a:tr h="457200">
+                <a:tc>
+                  <a:txBody>
+                    <a:bodyPr/>
+                    <a:lstStyle/>
+                    <a:p>
+                      <a:pPr>
+                        <a:defRPr sz="1100"/>
+                      </a:pPr>
+                      <a:r>
+                        <a:t>GSM8K</a:t>
+                      </a:r>
+                    </a:p>
+                  </a:txBody>
+                  <a:tcPr/>
+                </a:tc>
+                <a:tc>
+                  <a:txBody>
+                    <a:bodyPr/>
+                    <a:lstStyle/>
+                    <a:p>
+                      <a:pPr>
+                        <a:defRPr sz="1100"/>
+                      </a:pPr>
+                      <a:r>
+                        <a:t>Word Problems</a:t>
+                      </a:r>
+                    </a:p>
+                  </a:txBody>
+                  <a:tcPr/>
+                </a:tc>
+                <a:tc>
+                  <a:txBody>
+                    <a:bodyPr/>
+                    <a:lstStyle/>
+                    <a:p>
+                      <a:pPr>
+                        <a:defRPr sz="1100"/>
+                      </a:pPr>
+                      <a:r>
+                        <a:t>Llama-3.2-1B</a:t>
+                      </a:r>
+                    </a:p>
+                  </a:txBody>
+                  <a:tcPr/>
+                </a:tc>
+                <a:tc>
+                  <a:txBody>
+                    <a:bodyPr/>
+                    <a:lstStyle/>
+                    <a:p>
+                      <a:pPr>
+                        <a:defRPr sz="1100"/>
+                      </a:pPr>
+                      <a:r>
+                        <a:t>✓ Running</a:t>
+                      </a:r>
+                    </a:p>
+                  </a:txBody>
+                  <a:tcPr/>
+                </a:tc>
+                <a:tc>
+                  <a:txBody>
+                    <a:bodyPr/>
+                    <a:lstStyle/>
+                    <a:p>
+                      <a:pPr>
+                        <a:defRPr sz="1100"/>
+                      </a:pPr>
+                      <a:r>
+                        <a:t>Multi-step</a:t>
                       </a:r>
                     </a:p>
                   </a:txBody>
@@ -4503,624 +8420,6 @@
 </p:sld>
 </file>
 
-<file path=ppt/slides/slide5.xml><?xml version="1.0" encoding="utf-8"?>
-<p:sld xmlns:a="http://schemas.openxmlformats.org/drawingml/2006/main" xmlns:p="http://schemas.openxmlformats.org/presentationml/2006/main" xmlns:r="http://schemas.openxmlformats.org/officeDocument/2006/relationships">
-  <p:cSld>
-    <p:spTree>
-      <p:nvGrpSpPr>
-        <p:cNvPr id="1" name=""/>
-        <p:cNvGrpSpPr/>
-        <p:nvPr/>
-      </p:nvGrpSpPr>
-      <p:grpSpPr/>
-      <p:sp>
-        <p:nvSpPr>
-          <p:cNvPr id="2" name="TextBox 1"/>
-          <p:cNvSpPr txBox="1"/>
-          <p:nvPr/>
-        </p:nvSpPr>
-        <p:spPr>
-          <a:xfrm>
-            <a:off x="457200" y="274320"/>
-            <a:ext cx="8229600" cy="914400"/>
-          </a:xfrm>
-          <a:prstGeom prst="rect">
-            <a:avLst/>
-          </a:prstGeom>
-          <a:noFill/>
-        </p:spPr>
-        <p:txBody>
-          <a:bodyPr wrap="none">
-            <a:spAutoFit/>
-          </a:bodyPr>
-          <a:lstStyle/>
-          <a:p>
-            <a:pPr>
-              <a:defRPr sz="3200" b="1">
-                <a:solidFill>
-                  <a:srgbClr val="1A1A2E"/>
-                </a:solidFill>
-              </a:defRPr>
-            </a:pPr>
-            <a:r>
-              <a:t>Math RL: Arithmetic Results</a:t>
-            </a:r>
-          </a:p>
-        </p:txBody>
-      </p:sp>
-      <p:sp>
-        <p:nvSpPr>
-          <p:cNvPr id="3" name="TextBox 2"/>
-          <p:cNvSpPr txBox="1"/>
-          <p:nvPr/>
-        </p:nvSpPr>
-        <p:spPr>
-          <a:xfrm>
-            <a:off x="640080" y="1188720"/>
-            <a:ext cx="7772400" cy="5029200"/>
-          </a:xfrm>
-          <a:prstGeom prst="rect">
-            <a:avLst/>
-          </a:prstGeom>
-          <a:noFill/>
-        </p:spPr>
-        <p:txBody>
-          <a:bodyPr wrap="square">
-            <a:spAutoFit/>
-          </a:bodyPr>
-          <a:lstStyle/>
-          <a:p>
-            <a:pPr>
-              <a:spcAft>
-                <a:spcPts val="1200"/>
-              </a:spcAft>
-              <a:defRPr sz="2000">
-                <a:solidFill>
-                  <a:srgbClr val="333333"/>
-                </a:solidFill>
-              </a:defRPr>
-            </a:pPr>
-            <a:r>
-              <a:t>• Task: Train model to add two-digit numbers correctly</a:t>
-            </a:r>
-          </a:p>
-          <a:p>
-            <a:pPr>
-              <a:spcAft>
-                <a:spcPts val="1200"/>
-              </a:spcAft>
-              <a:defRPr sz="2000">
-                <a:solidFill>
-                  <a:srgbClr val="333333"/>
-                </a:solidFill>
-              </a:defRPr>
-            </a:pPr>
-            <a:r>
-              <a:t>• Starting accuracy: 69.5% | Final accuracy: 100%</a:t>
-            </a:r>
-          </a:p>
-          <a:p>
-            <a:pPr>
-              <a:spcAft>
-                <a:spcPts val="1200"/>
-              </a:spcAft>
-              <a:defRPr sz="2000">
-                <a:solidFill>
-                  <a:srgbClr val="333333"/>
-                </a:solidFill>
-              </a:defRPr>
-            </a:pPr>
-            <a:r>
-              <a:t>• Reward improved: 0.676 → 1.0 in ~20 steps</a:t>
-            </a:r>
-          </a:p>
-          <a:p>
-            <a:pPr>
-              <a:spcAft>
-                <a:spcPts val="1200"/>
-              </a:spcAft>
-              <a:defRPr sz="2000">
-                <a:solidFill>
-                  <a:srgbClr val="333333"/>
-                </a:solidFill>
-              </a:defRPr>
-            </a:pPr>
-            <a:r>
-              <a:t>• Training time: ~2 minutes total</a:t>
-            </a:r>
-          </a:p>
-          <a:p>
-            <a:pPr>
-              <a:spcAft>
-                <a:spcPts val="1200"/>
-              </a:spcAft>
-              <a:defRPr sz="2000">
-                <a:solidFill>
-                  <a:srgbClr val="333333"/>
-                </a:solidFill>
-              </a:defRPr>
-            </a:pPr>
-            <a:r>
-              <a:t>• Key insight: RL quickly masters simple arithmetic</a:t>
-            </a:r>
-          </a:p>
-        </p:txBody>
-      </p:sp>
-    </p:spTree>
-  </p:cSld>
-  <p:clrMapOvr>
-    <a:masterClrMapping/>
-  </p:clrMapOvr>
-</p:sld>
-</file>
-
-<file path=ppt/slides/slide6.xml><?xml version="1.0" encoding="utf-8"?>
-<p:sld xmlns:a="http://schemas.openxmlformats.org/drawingml/2006/main" xmlns:p="http://schemas.openxmlformats.org/presentationml/2006/main" xmlns:r="http://schemas.openxmlformats.org/officeDocument/2006/relationships">
-  <p:cSld>
-    <p:spTree>
-      <p:nvGrpSpPr>
-        <p:cNvPr id="1" name=""/>
-        <p:cNvGrpSpPr/>
-        <p:nvPr/>
-      </p:nvGrpSpPr>
-      <p:grpSpPr/>
-      <p:sp>
-        <p:nvSpPr>
-          <p:cNvPr id="2" name="TextBox 1"/>
-          <p:cNvSpPr txBox="1"/>
-          <p:nvPr/>
-        </p:nvSpPr>
-        <p:spPr>
-          <a:xfrm>
-            <a:off x="457200" y="274320"/>
-            <a:ext cx="8229600" cy="731520"/>
-          </a:xfrm>
-          <a:prstGeom prst="rect">
-            <a:avLst/>
-          </a:prstGeom>
-          <a:noFill/>
-        </p:spPr>
-        <p:txBody>
-          <a:bodyPr wrap="none">
-            <a:spAutoFit/>
-          </a:bodyPr>
-          <a:lstStyle/>
-          <a:p>
-            <a:pPr>
-              <a:defRPr sz="3200" b="1"/>
-            </a:pPr>
-            <a:r>
-              <a:t>Running Math RL Training</a:t>
-            </a:r>
-          </a:p>
-        </p:txBody>
-      </p:sp>
-      <p:sp>
-        <p:nvSpPr>
-          <p:cNvPr id="3" name="Rectangle 2"/>
-          <p:cNvSpPr/>
-          <p:nvPr/>
-        </p:nvSpPr>
-        <p:spPr>
-          <a:xfrm>
-            <a:off x="274320" y="1097280"/>
-            <a:ext cx="8595360" cy="4846320"/>
-          </a:xfrm>
-          <a:prstGeom prst="rect">
-            <a:avLst/>
-          </a:prstGeom>
-          <a:solidFill>
-            <a:srgbClr val="282828"/>
-          </a:solidFill>
-          <a:ln>
-            <a:noFill/>
-          </a:ln>
-        </p:spPr>
-        <p:style>
-          <a:lnRef idx="1">
-            <a:schemeClr val="accent1"/>
-          </a:lnRef>
-          <a:fillRef idx="3">
-            <a:schemeClr val="accent1"/>
-          </a:fillRef>
-          <a:effectRef idx="2">
-            <a:schemeClr val="accent1"/>
-          </a:effectRef>
-          <a:fontRef idx="minor">
-            <a:schemeClr val="lt1"/>
-          </a:fontRef>
-        </p:style>
-        <p:txBody>
-          <a:bodyPr rtlCol="0" anchor="ctr"/>
-          <a:lstStyle/>
-          <a:p>
-            <a:pPr algn="ctr"/>
-          </a:p>
-        </p:txBody>
-      </p:sp>
-      <p:sp>
-        <p:nvSpPr>
-          <p:cNvPr id="4" name="TextBox 3"/>
-          <p:cNvSpPr txBox="1"/>
-          <p:nvPr/>
-        </p:nvSpPr>
-        <p:spPr>
-          <a:xfrm>
-            <a:off x="457200" y="1280160"/>
-            <a:ext cx="8229600" cy="4572000"/>
-          </a:xfrm>
-          <a:prstGeom prst="rect">
-            <a:avLst/>
-          </a:prstGeom>
-          <a:noFill/>
-        </p:spPr>
-        <p:txBody>
-          <a:bodyPr wrap="square">
-            <a:spAutoFit/>
-          </a:bodyPr>
-          <a:lstStyle/>
-          <a:p>
-            <a:pPr>
-              <a:defRPr sz="1400">
-                <a:solidFill>
-                  <a:srgbClr val="00FF00"/>
-                </a:solidFill>
-                <a:latin typeface="Courier New"/>
-              </a:defRPr>
-            </a:pPr>
-            <a:r>
-              <a:t>python -m tinker_cookbook.recipes.math_rl.train \</a:t>
-            </a:r>
-            <a:br/>
-            <a:r>
-              <a:t>    model_name="meta-llama/Llama-3.2-1B" \</a:t>
-            </a:r>
-            <a:br/>
-            <a:r>
-              <a:t>    env=arithmetic \</a:t>
-            </a:r>
-            <a:br/>
-            <a:r>
-              <a:t>    group_size=4 \</a:t>
-            </a:r>
-            <a:br/>
-            <a:r>
-              <a:t>    groups_per_batch=100 \</a:t>
-            </a:r>
-            <a:br/>
-            <a:r>
-              <a:t>    learning_rate=1e-4</a:t>
-            </a:r>
-            <a:br/>
-            <a:br/>
-            <a:r>
-              <a:t># Output:</a:t>
-            </a:r>
-            <a:br/>
-            <a:r>
-              <a:t># Step 0:  reward=0.676, correct=69.5%</a:t>
-            </a:r>
-            <a:br/>
-            <a:r>
-              <a:t># Step 10: reward=0.998, correct=99.8%</a:t>
-            </a:r>
-            <a:br/>
-            <a:r>
-              <a:t># Step 20: reward=1.000, correct=100%</a:t>
-            </a:r>
-          </a:p>
-        </p:txBody>
-      </p:sp>
-    </p:spTree>
-  </p:cSld>
-  <p:clrMapOvr>
-    <a:masterClrMapping/>
-  </p:clrMapOvr>
-</p:sld>
-</file>
-
-<file path=ppt/slides/slide7.xml><?xml version="1.0" encoding="utf-8"?>
-<p:sld xmlns:a="http://schemas.openxmlformats.org/drawingml/2006/main" xmlns:p="http://schemas.openxmlformats.org/presentationml/2006/main" xmlns:r="http://schemas.openxmlformats.org/officeDocument/2006/relationships">
-  <p:cSld>
-    <p:spTree>
-      <p:nvGrpSpPr>
-        <p:cNvPr id="1" name=""/>
-        <p:cNvGrpSpPr/>
-        <p:nvPr/>
-      </p:nvGrpSpPr>
-      <p:grpSpPr/>
-      <p:sp>
-        <p:nvSpPr>
-          <p:cNvPr id="2" name="TextBox 1"/>
-          <p:cNvSpPr txBox="1"/>
-          <p:nvPr/>
-        </p:nvSpPr>
-        <p:spPr>
-          <a:xfrm>
-            <a:off x="457200" y="274320"/>
-            <a:ext cx="8229600" cy="914400"/>
-          </a:xfrm>
-          <a:prstGeom prst="rect">
-            <a:avLst/>
-          </a:prstGeom>
-          <a:noFill/>
-        </p:spPr>
-        <p:txBody>
-          <a:bodyPr wrap="none">
-            <a:spAutoFit/>
-          </a:bodyPr>
-          <a:lstStyle/>
-          <a:p>
-            <a:pPr>
-              <a:defRPr sz="3200" b="1">
-                <a:solidFill>
-                  <a:srgbClr val="1A1A2E"/>
-                </a:solidFill>
-              </a:defRPr>
-            </a:pPr>
-            <a:r>
-              <a:t>Preference Learning: Shorter Responses</a:t>
-            </a:r>
-          </a:p>
-        </p:txBody>
-      </p:sp>
-      <p:sp>
-        <p:nvSpPr>
-          <p:cNvPr id="3" name="TextBox 2"/>
-          <p:cNvSpPr txBox="1"/>
-          <p:nvPr/>
-        </p:nvSpPr>
-        <p:spPr>
-          <a:xfrm>
-            <a:off x="640080" y="1188720"/>
-            <a:ext cx="7772400" cy="5029200"/>
-          </a:xfrm>
-          <a:prstGeom prst="rect">
-            <a:avLst/>
-          </a:prstGeom>
-          <a:noFill/>
-        </p:spPr>
-        <p:txBody>
-          <a:bodyPr wrap="square">
-            <a:spAutoFit/>
-          </a:bodyPr>
-          <a:lstStyle/>
-          <a:p>
-            <a:pPr>
-              <a:spcAft>
-                <a:spcPts val="1200"/>
-              </a:spcAft>
-              <a:defRPr sz="2000">
-                <a:solidFill>
-                  <a:srgbClr val="333333"/>
-                </a:solidFill>
-              </a:defRPr>
-            </a:pPr>
-            <a:r>
-              <a:t>• Goal: Train model to generate concise responses</a:t>
-            </a:r>
-          </a:p>
-          <a:p>
-            <a:pPr>
-              <a:spcAft>
-                <a:spcPts val="1200"/>
-              </a:spcAft>
-              <a:defRPr sz="2000">
-                <a:solidFill>
-                  <a:srgbClr val="333333"/>
-                </a:solidFill>
-              </a:defRPr>
-            </a:pPr>
-            <a:r>
-              <a:t>• Method: Pairwise comparison - shorter response wins</a:t>
-            </a:r>
-          </a:p>
-          <a:p>
-            <a:pPr>
-              <a:spcAft>
-                <a:spcPts val="1200"/>
-              </a:spcAft>
-              <a:defRPr sz="2000">
-                <a:solidFill>
-                  <a:srgbClr val="333333"/>
-                </a:solidFill>
-              </a:defRPr>
-            </a:pPr>
-            <a:r>
-              <a:t>• Reward structure: win_minus_loss + format penalty</a:t>
-            </a:r>
-          </a:p>
-          <a:p>
-            <a:pPr>
-              <a:spcAft>
-                <a:spcPts val="1200"/>
-              </a:spcAft>
-              <a:defRPr sz="2000">
-                <a:solidFill>
-                  <a:srgbClr val="333333"/>
-                </a:solidFill>
-              </a:defRPr>
-            </a:pPr>
-            <a:r>
-              <a:t>• Observation: Model learns to end responses properly</a:t>
-            </a:r>
-          </a:p>
-          <a:p>
-            <a:pPr>
-              <a:spcAft>
-                <a:spcPts val="1200"/>
-              </a:spcAft>
-              <a:defRPr sz="2000">
-                <a:solidFill>
-                  <a:srgbClr val="333333"/>
-                </a:solidFill>
-              </a:defRPr>
-            </a:pPr>
-            <a:r>
-              <a:t>• Trade-off: Balancing brevity with informativeness</a:t>
-            </a:r>
-          </a:p>
-        </p:txBody>
-      </p:sp>
-    </p:spTree>
-  </p:cSld>
-  <p:clrMapOvr>
-    <a:masterClrMapping/>
-  </p:clrMapOvr>
-</p:sld>
-</file>
-
-<file path=ppt/slides/slide8.xml><?xml version="1.0" encoding="utf-8"?>
-<p:sld xmlns:a="http://schemas.openxmlformats.org/drawingml/2006/main" xmlns:p="http://schemas.openxmlformats.org/presentationml/2006/main" xmlns:r="http://schemas.openxmlformats.org/officeDocument/2006/relationships">
-  <p:cSld>
-    <p:spTree>
-      <p:nvGrpSpPr>
-        <p:cNvPr id="1" name=""/>
-        <p:cNvGrpSpPr/>
-        <p:nvPr/>
-      </p:nvGrpSpPr>
-      <p:grpSpPr/>
-      <p:sp>
-        <p:nvSpPr>
-          <p:cNvPr id="2" name="TextBox 1"/>
-          <p:cNvSpPr txBox="1"/>
-          <p:nvPr/>
-        </p:nvSpPr>
-        <p:spPr>
-          <a:xfrm>
-            <a:off x="457200" y="274320"/>
-            <a:ext cx="8229600" cy="914400"/>
-          </a:xfrm>
-          <a:prstGeom prst="rect">
-            <a:avLst/>
-          </a:prstGeom>
-          <a:noFill/>
-        </p:spPr>
-        <p:txBody>
-          <a:bodyPr wrap="none">
-            <a:spAutoFit/>
-          </a:bodyPr>
-          <a:lstStyle/>
-          <a:p>
-            <a:pPr>
-              <a:defRPr sz="3200" b="1">
-                <a:solidFill>
-                  <a:srgbClr val="1A1A2E"/>
-                </a:solidFill>
-              </a:defRPr>
-            </a:pPr>
-            <a:r>
-              <a:t>Knowledge Distillation</a:t>
-            </a:r>
-          </a:p>
-        </p:txBody>
-      </p:sp>
-      <p:sp>
-        <p:nvSpPr>
-          <p:cNvPr id="3" name="TextBox 2"/>
-          <p:cNvSpPr txBox="1"/>
-          <p:nvPr/>
-        </p:nvSpPr>
-        <p:spPr>
-          <a:xfrm>
-            <a:off x="640080" y="1188720"/>
-            <a:ext cx="7772400" cy="5029200"/>
-          </a:xfrm>
-          <a:prstGeom prst="rect">
-            <a:avLst/>
-          </a:prstGeom>
-          <a:noFill/>
-        </p:spPr>
-        <p:txBody>
-          <a:bodyPr wrap="square">
-            <a:spAutoFit/>
-          </a:bodyPr>
-          <a:lstStyle/>
-          <a:p>
-            <a:pPr>
-              <a:spcAft>
-                <a:spcPts val="1200"/>
-              </a:spcAft>
-              <a:defRPr sz="2000">
-                <a:solidFill>
-                  <a:srgbClr val="333333"/>
-                </a:solidFill>
-              </a:defRPr>
-            </a:pPr>
-            <a:r>
-              <a:t>• Off-Policy: Train on pre-collected teacher traces (SFT)</a:t>
-            </a:r>
-          </a:p>
-          <a:p>
-            <a:pPr>
-              <a:spcAft>
-                <a:spcPts val="1200"/>
-              </a:spcAft>
-              <a:defRPr sz="2000">
-                <a:solidFill>
-                  <a:srgbClr val="333333"/>
-                </a:solidFill>
-              </a:defRPr>
-            </a:pPr>
-            <a:r>
-              <a:t>• On-Policy: Student generates, minimizes KL to teacher</a:t>
-            </a:r>
-          </a:p>
-          <a:p>
-            <a:pPr>
-              <a:spcAft>
-                <a:spcPts val="1200"/>
-              </a:spcAft>
-              <a:defRPr sz="2000">
-                <a:solidFill>
-                  <a:srgbClr val="333333"/>
-                </a:solidFill>
-              </a:defRPr>
-            </a:pPr>
-            <a:r>
-              <a:t>• Dataset: OpenThoughts3 (1.2M reasoning traces)</a:t>
-            </a:r>
-          </a:p>
-          <a:p>
-            <a:pPr>
-              <a:spcAft>
-                <a:spcPts val="1200"/>
-              </a:spcAft>
-              <a:defRPr sz="2000">
-                <a:solidFill>
-                  <a:srgbClr val="333333"/>
-                </a:solidFill>
-              </a:defRPr>
-            </a:pPr>
-            <a:r>
-              <a:t>• Metric: Teacher KL divergence decreases over training</a:t>
-            </a:r>
-          </a:p>
-          <a:p>
-            <a:pPr>
-              <a:spcAft>
-                <a:spcPts val="1200"/>
-              </a:spcAft>
-              <a:defRPr sz="2000">
-                <a:solidFill>
-                  <a:srgbClr val="333333"/>
-                </a:solidFill>
-              </a:defRPr>
-            </a:pPr>
-            <a:r>
-              <a:t>• Benefit: Smaller student learns from larger teacher</a:t>
-            </a:r>
-          </a:p>
-        </p:txBody>
-      </p:sp>
-    </p:spTree>
-  </p:cSld>
-  <p:clrMapOvr>
-    <a:masterClrMapping/>
-  </p:clrMapOvr>
-</p:sld>
-</file>
-
 <file path=ppt/slides/slide9.xml><?xml version="1.0" encoding="utf-8"?>
 <p:sld xmlns:a="http://schemas.openxmlformats.org/drawingml/2006/main" xmlns:p="http://schemas.openxmlformats.org/presentationml/2006/main" xmlns:r="http://schemas.openxmlformats.org/officeDocument/2006/relationships">
   <p:cSld>
@@ -5139,8 +8438,8 @@
         </p:nvSpPr>
         <p:spPr>
           <a:xfrm>
-            <a:off x="457200" y="274320"/>
-            <a:ext cx="8229600" cy="914400"/>
+            <a:off x="457200" y="137160"/>
+            <a:ext cx="8229600" cy="640080"/>
           </a:xfrm>
           <a:prstGeom prst="rect">
             <a:avLst/>
@@ -5154,28 +8453,979 @@
           <a:lstStyle/>
           <a:p>
             <a:pPr>
-              <a:defRPr sz="3200" b="1">
+              <a:defRPr sz="2800" b="1">
                 <a:solidFill>
                   <a:srgbClr val="1A1A2E"/>
                 </a:solidFill>
               </a:defRPr>
             </a:pPr>
             <a:r>
-              <a:t>Technical Architecture</a:t>
-            </a:r>
-          </a:p>
-        </p:txBody>
-      </p:sp>
-      <p:sp>
-        <p:nvSpPr>
-          <p:cNvPr id="3" name="TextBox 2"/>
+              <a:t>Math RL Results: Learning Curve</a:t>
+            </a:r>
+          </a:p>
+        </p:txBody>
+      </p:sp>
+      <p:sp>
+        <p:nvSpPr>
+          <p:cNvPr id="3" name="Rectangle 2"/>
+          <p:cNvSpPr/>
+          <p:nvPr/>
+        </p:nvSpPr>
+        <p:spPr>
+          <a:xfrm>
+            <a:off x="1371600" y="1188720"/>
+            <a:ext cx="27432" cy="3840480"/>
+          </a:xfrm>
+          <a:prstGeom prst="rect">
+            <a:avLst/>
+          </a:prstGeom>
+          <a:solidFill>
+            <a:srgbClr val="1A1A2E"/>
+          </a:solidFill>
+          <a:ln>
+            <a:noFill/>
+          </a:ln>
+        </p:spPr>
+        <p:style>
+          <a:lnRef idx="1">
+            <a:schemeClr val="accent1"/>
+          </a:lnRef>
+          <a:fillRef idx="3">
+            <a:schemeClr val="accent1"/>
+          </a:fillRef>
+          <a:effectRef idx="2">
+            <a:schemeClr val="accent1"/>
+          </a:effectRef>
+          <a:fontRef idx="minor">
+            <a:schemeClr val="lt1"/>
+          </a:fontRef>
+        </p:style>
+        <p:txBody>
+          <a:bodyPr rtlCol="0" anchor="ctr"/>
+          <a:lstStyle/>
+          <a:p>
+            <a:pPr algn="ctr"/>
+          </a:p>
+        </p:txBody>
+      </p:sp>
+      <p:sp>
+        <p:nvSpPr>
+          <p:cNvPr id="4" name="Rectangle 3"/>
+          <p:cNvSpPr/>
+          <p:nvPr/>
+        </p:nvSpPr>
+        <p:spPr>
+          <a:xfrm>
+            <a:off x="1371600" y="5029200"/>
+            <a:ext cx="5029200" cy="27432"/>
+          </a:xfrm>
+          <a:prstGeom prst="rect">
+            <a:avLst/>
+          </a:prstGeom>
+          <a:solidFill>
+            <a:srgbClr val="1A1A2E"/>
+          </a:solidFill>
+          <a:ln>
+            <a:noFill/>
+          </a:ln>
+        </p:spPr>
+        <p:style>
+          <a:lnRef idx="1">
+            <a:schemeClr val="accent1"/>
+          </a:lnRef>
+          <a:fillRef idx="3">
+            <a:schemeClr val="accent1"/>
+          </a:fillRef>
+          <a:effectRef idx="2">
+            <a:schemeClr val="accent1"/>
+          </a:effectRef>
+          <a:fontRef idx="minor">
+            <a:schemeClr val="lt1"/>
+          </a:fontRef>
+        </p:style>
+        <p:txBody>
+          <a:bodyPr rtlCol="0" anchor="ctr"/>
+          <a:lstStyle/>
+          <a:p>
+            <a:pPr algn="ctr"/>
+          </a:p>
+        </p:txBody>
+      </p:sp>
+      <p:sp>
+        <p:nvSpPr>
+          <p:cNvPr id="5" name="TextBox 4"/>
           <p:cNvSpPr txBox="1"/>
           <p:nvPr/>
         </p:nvSpPr>
         <p:spPr>
           <a:xfrm>
-            <a:off x="640080" y="1188720"/>
-            <a:ext cx="7772400" cy="5029200"/>
+            <a:off x="914400" y="1097280"/>
+            <a:ext cx="457200" cy="274320"/>
+          </a:xfrm>
+          <a:prstGeom prst="rect">
+            <a:avLst/>
+          </a:prstGeom>
+          <a:noFill/>
+        </p:spPr>
+        <p:txBody>
+          <a:bodyPr wrap="none">
+            <a:spAutoFit/>
+          </a:bodyPr>
+          <a:lstStyle/>
+          <a:p>
+            <a:pPr>
+              <a:defRPr sz="1100">
+                <a:solidFill>
+                  <a:srgbClr val="666666"/>
+                </a:solidFill>
+              </a:defRPr>
+            </a:pPr>
+            <a:r>
+              <a:t>1.0</a:t>
+            </a:r>
+          </a:p>
+        </p:txBody>
+      </p:sp>
+      <p:sp>
+        <p:nvSpPr>
+          <p:cNvPr id="6" name="TextBox 5"/>
+          <p:cNvSpPr txBox="1"/>
+          <p:nvPr/>
+        </p:nvSpPr>
+        <p:spPr>
+          <a:xfrm>
+            <a:off x="914400" y="1874519"/>
+            <a:ext cx="457200" cy="274320"/>
+          </a:xfrm>
+          <a:prstGeom prst="rect">
+            <a:avLst/>
+          </a:prstGeom>
+          <a:noFill/>
+        </p:spPr>
+        <p:txBody>
+          <a:bodyPr wrap="none">
+            <a:spAutoFit/>
+          </a:bodyPr>
+          <a:lstStyle/>
+          <a:p>
+            <a:pPr>
+              <a:defRPr sz="1100">
+                <a:solidFill>
+                  <a:srgbClr val="666666"/>
+                </a:solidFill>
+              </a:defRPr>
+            </a:pPr>
+            <a:r>
+              <a:t>0.8</a:t>
+            </a:r>
+          </a:p>
+        </p:txBody>
+      </p:sp>
+      <p:sp>
+        <p:nvSpPr>
+          <p:cNvPr id="7" name="TextBox 6"/>
+          <p:cNvSpPr txBox="1"/>
+          <p:nvPr/>
+        </p:nvSpPr>
+        <p:spPr>
+          <a:xfrm>
+            <a:off x="914400" y="2651760"/>
+            <a:ext cx="457200" cy="274320"/>
+          </a:xfrm>
+          <a:prstGeom prst="rect">
+            <a:avLst/>
+          </a:prstGeom>
+          <a:noFill/>
+        </p:spPr>
+        <p:txBody>
+          <a:bodyPr wrap="none">
+            <a:spAutoFit/>
+          </a:bodyPr>
+          <a:lstStyle/>
+          <a:p>
+            <a:pPr>
+              <a:defRPr sz="1100">
+                <a:solidFill>
+                  <a:srgbClr val="666666"/>
+                </a:solidFill>
+              </a:defRPr>
+            </a:pPr>
+            <a:r>
+              <a:t>0.6</a:t>
+            </a:r>
+          </a:p>
+        </p:txBody>
+      </p:sp>
+      <p:sp>
+        <p:nvSpPr>
+          <p:cNvPr id="8" name="TextBox 7"/>
+          <p:cNvSpPr txBox="1"/>
+          <p:nvPr/>
+        </p:nvSpPr>
+        <p:spPr>
+          <a:xfrm>
+            <a:off x="914400" y="3429000"/>
+            <a:ext cx="457200" cy="274320"/>
+          </a:xfrm>
+          <a:prstGeom prst="rect">
+            <a:avLst/>
+          </a:prstGeom>
+          <a:noFill/>
+        </p:spPr>
+        <p:txBody>
+          <a:bodyPr wrap="none">
+            <a:spAutoFit/>
+          </a:bodyPr>
+          <a:lstStyle/>
+          <a:p>
+            <a:pPr>
+              <a:defRPr sz="1100">
+                <a:solidFill>
+                  <a:srgbClr val="666666"/>
+                </a:solidFill>
+              </a:defRPr>
+            </a:pPr>
+            <a:r>
+              <a:t>0.4</a:t>
+            </a:r>
+          </a:p>
+        </p:txBody>
+      </p:sp>
+      <p:sp>
+        <p:nvSpPr>
+          <p:cNvPr id="9" name="TextBox 8"/>
+          <p:cNvSpPr txBox="1"/>
+          <p:nvPr/>
+        </p:nvSpPr>
+        <p:spPr>
+          <a:xfrm>
+            <a:off x="914400" y="4206240"/>
+            <a:ext cx="457200" cy="274320"/>
+          </a:xfrm>
+          <a:prstGeom prst="rect">
+            <a:avLst/>
+          </a:prstGeom>
+          <a:noFill/>
+        </p:spPr>
+        <p:txBody>
+          <a:bodyPr wrap="none">
+            <a:spAutoFit/>
+          </a:bodyPr>
+          <a:lstStyle/>
+          <a:p>
+            <a:pPr>
+              <a:defRPr sz="1100">
+                <a:solidFill>
+                  <a:srgbClr val="666666"/>
+                </a:solidFill>
+              </a:defRPr>
+            </a:pPr>
+            <a:r>
+              <a:t>0.2</a:t>
+            </a:r>
+          </a:p>
+        </p:txBody>
+      </p:sp>
+      <p:sp>
+        <p:nvSpPr>
+          <p:cNvPr id="10" name="TextBox 9"/>
+          <p:cNvSpPr txBox="1"/>
+          <p:nvPr/>
+        </p:nvSpPr>
+        <p:spPr>
+          <a:xfrm>
+            <a:off x="1280160" y="5120640"/>
+            <a:ext cx="457200" cy="274320"/>
+          </a:xfrm>
+          <a:prstGeom prst="rect">
+            <a:avLst/>
+          </a:prstGeom>
+          <a:noFill/>
+        </p:spPr>
+        <p:txBody>
+          <a:bodyPr wrap="none">
+            <a:spAutoFit/>
+          </a:bodyPr>
+          <a:lstStyle/>
+          <a:p>
+            <a:pPr>
+              <a:defRPr sz="1100">
+                <a:solidFill>
+                  <a:srgbClr val="666666"/>
+                </a:solidFill>
+              </a:defRPr>
+            </a:pPr>
+            <a:r>
+              <a:t>0</a:t>
+            </a:r>
+          </a:p>
+        </p:txBody>
+      </p:sp>
+      <p:sp>
+        <p:nvSpPr>
+          <p:cNvPr id="11" name="TextBox 10"/>
+          <p:cNvSpPr txBox="1"/>
+          <p:nvPr/>
+        </p:nvSpPr>
+        <p:spPr>
+          <a:xfrm>
+            <a:off x="2286000" y="5120640"/>
+            <a:ext cx="457200" cy="274320"/>
+          </a:xfrm>
+          <a:prstGeom prst="rect">
+            <a:avLst/>
+          </a:prstGeom>
+          <a:noFill/>
+        </p:spPr>
+        <p:txBody>
+          <a:bodyPr wrap="none">
+            <a:spAutoFit/>
+          </a:bodyPr>
+          <a:lstStyle/>
+          <a:p>
+            <a:pPr>
+              <a:defRPr sz="1100">
+                <a:solidFill>
+                  <a:srgbClr val="666666"/>
+                </a:solidFill>
+              </a:defRPr>
+            </a:pPr>
+            <a:r>
+              <a:t>5</a:t>
+            </a:r>
+          </a:p>
+        </p:txBody>
+      </p:sp>
+      <p:sp>
+        <p:nvSpPr>
+          <p:cNvPr id="12" name="TextBox 11"/>
+          <p:cNvSpPr txBox="1"/>
+          <p:nvPr/>
+        </p:nvSpPr>
+        <p:spPr>
+          <a:xfrm>
+            <a:off x="3291840" y="5120640"/>
+            <a:ext cx="457200" cy="274320"/>
+          </a:xfrm>
+          <a:prstGeom prst="rect">
+            <a:avLst/>
+          </a:prstGeom>
+          <a:noFill/>
+        </p:spPr>
+        <p:txBody>
+          <a:bodyPr wrap="none">
+            <a:spAutoFit/>
+          </a:bodyPr>
+          <a:lstStyle/>
+          <a:p>
+            <a:pPr>
+              <a:defRPr sz="1100">
+                <a:solidFill>
+                  <a:srgbClr val="666666"/>
+                </a:solidFill>
+              </a:defRPr>
+            </a:pPr>
+            <a:r>
+              <a:t>10</a:t>
+            </a:r>
+          </a:p>
+        </p:txBody>
+      </p:sp>
+      <p:sp>
+        <p:nvSpPr>
+          <p:cNvPr id="13" name="TextBox 12"/>
+          <p:cNvSpPr txBox="1"/>
+          <p:nvPr/>
+        </p:nvSpPr>
+        <p:spPr>
+          <a:xfrm>
+            <a:off x="4297680" y="5120640"/>
+            <a:ext cx="457200" cy="274320"/>
+          </a:xfrm>
+          <a:prstGeom prst="rect">
+            <a:avLst/>
+          </a:prstGeom>
+          <a:noFill/>
+        </p:spPr>
+        <p:txBody>
+          <a:bodyPr wrap="none">
+            <a:spAutoFit/>
+          </a:bodyPr>
+          <a:lstStyle/>
+          <a:p>
+            <a:pPr>
+              <a:defRPr sz="1100">
+                <a:solidFill>
+                  <a:srgbClr val="666666"/>
+                </a:solidFill>
+              </a:defRPr>
+            </a:pPr>
+            <a:r>
+              <a:t>15</a:t>
+            </a:r>
+          </a:p>
+        </p:txBody>
+      </p:sp>
+      <p:sp>
+        <p:nvSpPr>
+          <p:cNvPr id="14" name="TextBox 13"/>
+          <p:cNvSpPr txBox="1"/>
+          <p:nvPr/>
+        </p:nvSpPr>
+        <p:spPr>
+          <a:xfrm>
+            <a:off x="5303520" y="5120640"/>
+            <a:ext cx="457200" cy="274320"/>
+          </a:xfrm>
+          <a:prstGeom prst="rect">
+            <a:avLst/>
+          </a:prstGeom>
+          <a:noFill/>
+        </p:spPr>
+        <p:txBody>
+          <a:bodyPr wrap="none">
+            <a:spAutoFit/>
+          </a:bodyPr>
+          <a:lstStyle/>
+          <a:p>
+            <a:pPr>
+              <a:defRPr sz="1100">
+                <a:solidFill>
+                  <a:srgbClr val="666666"/>
+                </a:solidFill>
+              </a:defRPr>
+            </a:pPr>
+            <a:r>
+              <a:t>20</a:t>
+            </a:r>
+          </a:p>
+        </p:txBody>
+      </p:sp>
+      <p:sp>
+        <p:nvSpPr>
+          <p:cNvPr id="15" name="TextBox 14"/>
+          <p:cNvSpPr txBox="1"/>
+          <p:nvPr/>
+        </p:nvSpPr>
+        <p:spPr>
+          <a:xfrm>
+            <a:off x="274320" y="2743200"/>
+            <a:ext cx="731520" cy="457200"/>
+          </a:xfrm>
+          <a:prstGeom prst="rect">
+            <a:avLst/>
+          </a:prstGeom>
+          <a:noFill/>
+        </p:spPr>
+        <p:txBody>
+          <a:bodyPr wrap="none">
+            <a:spAutoFit/>
+          </a:bodyPr>
+          <a:lstStyle/>
+          <a:p>
+            <a:pPr>
+              <a:defRPr sz="1200" b="1">
+                <a:solidFill>
+                  <a:srgbClr val="1A1A2E"/>
+                </a:solidFill>
+              </a:defRPr>
+            </a:pPr>
+            <a:r>
+              <a:t>Reward</a:t>
+            </a:r>
+          </a:p>
+        </p:txBody>
+      </p:sp>
+      <p:sp>
+        <p:nvSpPr>
+          <p:cNvPr id="16" name="TextBox 15"/>
+          <p:cNvSpPr txBox="1"/>
+          <p:nvPr/>
+        </p:nvSpPr>
+        <p:spPr>
+          <a:xfrm>
+            <a:off x="3474720" y="5394960"/>
+            <a:ext cx="1371600" cy="365760"/>
+          </a:xfrm>
+          <a:prstGeom prst="rect">
+            <a:avLst/>
+          </a:prstGeom>
+          <a:noFill/>
+        </p:spPr>
+        <p:txBody>
+          <a:bodyPr wrap="none">
+            <a:spAutoFit/>
+          </a:bodyPr>
+          <a:lstStyle/>
+          <a:p>
+            <a:pPr>
+              <a:defRPr sz="1200" b="1">
+                <a:solidFill>
+                  <a:srgbClr val="1A1A2E"/>
+                </a:solidFill>
+              </a:defRPr>
+            </a:pPr>
+            <a:r>
+              <a:t>Step</a:t>
+            </a:r>
+          </a:p>
+        </p:txBody>
+      </p:sp>
+      <p:sp>
+        <p:nvSpPr>
+          <p:cNvPr id="17" name="Oval 16"/>
+          <p:cNvSpPr/>
+          <p:nvPr/>
+        </p:nvSpPr>
+        <p:spPr>
+          <a:xfrm>
+            <a:off x="1463039" y="3566160"/>
+            <a:ext cx="182880" cy="182880"/>
+          </a:xfrm>
+          <a:prstGeom prst="ellipse">
+            <a:avLst/>
+          </a:prstGeom>
+          <a:solidFill>
+            <a:srgbClr val="28A745"/>
+          </a:solidFill>
+          <a:ln>
+            <a:solidFill>
+              <a:srgbClr val="1A1A2E"/>
+            </a:solidFill>
+          </a:ln>
+        </p:spPr>
+        <p:style>
+          <a:lnRef idx="1">
+            <a:schemeClr val="accent1"/>
+          </a:lnRef>
+          <a:fillRef idx="3">
+            <a:schemeClr val="accent1"/>
+          </a:fillRef>
+          <a:effectRef idx="2">
+            <a:schemeClr val="accent1"/>
+          </a:effectRef>
+          <a:fontRef idx="minor">
+            <a:schemeClr val="lt1"/>
+          </a:fontRef>
+        </p:style>
+        <p:txBody>
+          <a:bodyPr rtlCol="0" anchor="ctr"/>
+          <a:lstStyle/>
+          <a:p>
+            <a:pPr algn="ctr"/>
+          </a:p>
+        </p:txBody>
+      </p:sp>
+      <p:sp>
+        <p:nvSpPr>
+          <p:cNvPr id="18" name="TextBox 17"/>
+          <p:cNvSpPr txBox="1"/>
+          <p:nvPr/>
+        </p:nvSpPr>
+        <p:spPr>
+          <a:xfrm>
+            <a:off x="1371600" y="3246120"/>
+            <a:ext cx="457200" cy="274320"/>
+          </a:xfrm>
+          <a:prstGeom prst="rect">
+            <a:avLst/>
+          </a:prstGeom>
+          <a:noFill/>
+        </p:spPr>
+        <p:txBody>
+          <a:bodyPr wrap="none">
+            <a:spAutoFit/>
+          </a:bodyPr>
+          <a:lstStyle/>
+          <a:p>
+            <a:pPr>
+              <a:defRPr sz="1000" b="1">
+                <a:solidFill>
+                  <a:srgbClr val="28A745"/>
+                </a:solidFill>
+              </a:defRPr>
+            </a:pPr>
+            <a:r>
+              <a:t>0.67</a:t>
+            </a:r>
+          </a:p>
+        </p:txBody>
+      </p:sp>
+      <p:sp>
+        <p:nvSpPr>
+          <p:cNvPr id="19" name="Oval 18"/>
+          <p:cNvSpPr/>
+          <p:nvPr/>
+        </p:nvSpPr>
+        <p:spPr>
+          <a:xfrm>
+            <a:off x="2468879" y="2286000"/>
+            <a:ext cx="182880" cy="182880"/>
+          </a:xfrm>
+          <a:prstGeom prst="ellipse">
+            <a:avLst/>
+          </a:prstGeom>
+          <a:solidFill>
+            <a:srgbClr val="28A745"/>
+          </a:solidFill>
+          <a:ln>
+            <a:solidFill>
+              <a:srgbClr val="1A1A2E"/>
+            </a:solidFill>
+          </a:ln>
+        </p:spPr>
+        <p:style>
+          <a:lnRef idx="1">
+            <a:schemeClr val="accent1"/>
+          </a:lnRef>
+          <a:fillRef idx="3">
+            <a:schemeClr val="accent1"/>
+          </a:fillRef>
+          <a:effectRef idx="2">
+            <a:schemeClr val="accent1"/>
+          </a:effectRef>
+          <a:fontRef idx="minor">
+            <a:schemeClr val="lt1"/>
+          </a:fontRef>
+        </p:style>
+        <p:txBody>
+          <a:bodyPr rtlCol="0" anchor="ctr"/>
+          <a:lstStyle/>
+          <a:p>
+            <a:pPr algn="ctr"/>
+          </a:p>
+        </p:txBody>
+      </p:sp>
+      <p:sp>
+        <p:nvSpPr>
+          <p:cNvPr id="20" name="TextBox 19"/>
+          <p:cNvSpPr txBox="1"/>
+          <p:nvPr/>
+        </p:nvSpPr>
+        <p:spPr>
+          <a:xfrm>
+            <a:off x="2377439" y="1965960"/>
+            <a:ext cx="457200" cy="274320"/>
+          </a:xfrm>
+          <a:prstGeom prst="rect">
+            <a:avLst/>
+          </a:prstGeom>
+          <a:noFill/>
+        </p:spPr>
+        <p:txBody>
+          <a:bodyPr wrap="none">
+            <a:spAutoFit/>
+          </a:bodyPr>
+          <a:lstStyle/>
+          <a:p>
+            <a:pPr>
+              <a:defRPr sz="1000" b="1">
+                <a:solidFill>
+                  <a:srgbClr val="28A745"/>
+                </a:solidFill>
+              </a:defRPr>
+            </a:pPr>
+            <a:r>
+              <a:t>0.85</a:t>
+            </a:r>
+          </a:p>
+        </p:txBody>
+      </p:sp>
+      <p:sp>
+        <p:nvSpPr>
+          <p:cNvPr id="21" name="Oval 20"/>
+          <p:cNvSpPr/>
+          <p:nvPr/>
+        </p:nvSpPr>
+        <p:spPr>
+          <a:xfrm>
+            <a:off x="3474720" y="1645919"/>
+            <a:ext cx="182880" cy="182880"/>
+          </a:xfrm>
+          <a:prstGeom prst="ellipse">
+            <a:avLst/>
+          </a:prstGeom>
+          <a:solidFill>
+            <a:srgbClr val="28A745"/>
+          </a:solidFill>
+          <a:ln>
+            <a:solidFill>
+              <a:srgbClr val="1A1A2E"/>
+            </a:solidFill>
+          </a:ln>
+        </p:spPr>
+        <p:style>
+          <a:lnRef idx="1">
+            <a:schemeClr val="accent1"/>
+          </a:lnRef>
+          <a:fillRef idx="3">
+            <a:schemeClr val="accent1"/>
+          </a:fillRef>
+          <a:effectRef idx="2">
+            <a:schemeClr val="accent1"/>
+          </a:effectRef>
+          <a:fontRef idx="minor">
+            <a:schemeClr val="lt1"/>
+          </a:fontRef>
+        </p:style>
+        <p:txBody>
+          <a:bodyPr rtlCol="0" anchor="ctr"/>
+          <a:lstStyle/>
+          <a:p>
+            <a:pPr algn="ctr"/>
+          </a:p>
+        </p:txBody>
+      </p:sp>
+      <p:sp>
+        <p:nvSpPr>
+          <p:cNvPr id="22" name="TextBox 21"/>
+          <p:cNvSpPr txBox="1"/>
+          <p:nvPr/>
+        </p:nvSpPr>
+        <p:spPr>
+          <a:xfrm>
+            <a:off x="3383279" y="1325880"/>
+            <a:ext cx="457200" cy="274320"/>
+          </a:xfrm>
+          <a:prstGeom prst="rect">
+            <a:avLst/>
+          </a:prstGeom>
+          <a:noFill/>
+        </p:spPr>
+        <p:txBody>
+          <a:bodyPr wrap="none">
+            <a:spAutoFit/>
+          </a:bodyPr>
+          <a:lstStyle/>
+          <a:p>
+            <a:pPr>
+              <a:defRPr sz="1000" b="1">
+                <a:solidFill>
+                  <a:srgbClr val="28A745"/>
+                </a:solidFill>
+              </a:defRPr>
+            </a:pPr>
+            <a:r>
+              <a:t>0.95</a:t>
+            </a:r>
+          </a:p>
+        </p:txBody>
+      </p:sp>
+      <p:sp>
+        <p:nvSpPr>
+          <p:cNvPr id="23" name="Oval 22"/>
+          <p:cNvSpPr/>
+          <p:nvPr/>
+        </p:nvSpPr>
+        <p:spPr>
+          <a:xfrm>
+            <a:off x="4480560" y="1325880"/>
+            <a:ext cx="182880" cy="182880"/>
+          </a:xfrm>
+          <a:prstGeom prst="ellipse">
+            <a:avLst/>
+          </a:prstGeom>
+          <a:solidFill>
+            <a:srgbClr val="28A745"/>
+          </a:solidFill>
+          <a:ln>
+            <a:solidFill>
+              <a:srgbClr val="1A1A2E"/>
+            </a:solidFill>
+          </a:ln>
+        </p:spPr>
+        <p:style>
+          <a:lnRef idx="1">
+            <a:schemeClr val="accent1"/>
+          </a:lnRef>
+          <a:fillRef idx="3">
+            <a:schemeClr val="accent1"/>
+          </a:fillRef>
+          <a:effectRef idx="2">
+            <a:schemeClr val="accent1"/>
+          </a:effectRef>
+          <a:fontRef idx="minor">
+            <a:schemeClr val="lt1"/>
+          </a:fontRef>
+        </p:style>
+        <p:txBody>
+          <a:bodyPr rtlCol="0" anchor="ctr"/>
+          <a:lstStyle/>
+          <a:p>
+            <a:pPr algn="ctr"/>
+          </a:p>
+        </p:txBody>
+      </p:sp>
+      <p:sp>
+        <p:nvSpPr>
+          <p:cNvPr id="24" name="TextBox 23"/>
+          <p:cNvSpPr txBox="1"/>
+          <p:nvPr/>
+        </p:nvSpPr>
+        <p:spPr>
+          <a:xfrm>
+            <a:off x="4389120" y="1005840"/>
+            <a:ext cx="457200" cy="274320"/>
+          </a:xfrm>
+          <a:prstGeom prst="rect">
+            <a:avLst/>
+          </a:prstGeom>
+          <a:noFill/>
+        </p:spPr>
+        <p:txBody>
+          <a:bodyPr wrap="none">
+            <a:spAutoFit/>
+          </a:bodyPr>
+          <a:lstStyle/>
+          <a:p>
+            <a:pPr>
+              <a:defRPr sz="1000" b="1">
+                <a:solidFill>
+                  <a:srgbClr val="28A745"/>
+                </a:solidFill>
+              </a:defRPr>
+            </a:pPr>
+            <a:r>
+              <a:t>0.99</a:t>
+            </a:r>
+          </a:p>
+        </p:txBody>
+      </p:sp>
+      <p:sp>
+        <p:nvSpPr>
+          <p:cNvPr id="25" name="Oval 24"/>
+          <p:cNvSpPr/>
+          <p:nvPr/>
+        </p:nvSpPr>
+        <p:spPr>
+          <a:xfrm>
+            <a:off x="5486400" y="1143000"/>
+            <a:ext cx="182880" cy="182880"/>
+          </a:xfrm>
+          <a:prstGeom prst="ellipse">
+            <a:avLst/>
+          </a:prstGeom>
+          <a:solidFill>
+            <a:srgbClr val="28A745"/>
+          </a:solidFill>
+          <a:ln>
+            <a:solidFill>
+              <a:srgbClr val="1A1A2E"/>
+            </a:solidFill>
+          </a:ln>
+        </p:spPr>
+        <p:style>
+          <a:lnRef idx="1">
+            <a:schemeClr val="accent1"/>
+          </a:lnRef>
+          <a:fillRef idx="3">
+            <a:schemeClr val="accent1"/>
+          </a:fillRef>
+          <a:effectRef idx="2">
+            <a:schemeClr val="accent1"/>
+          </a:effectRef>
+          <a:fontRef idx="minor">
+            <a:schemeClr val="lt1"/>
+          </a:fontRef>
+        </p:style>
+        <p:txBody>
+          <a:bodyPr rtlCol="0" anchor="ctr"/>
+          <a:lstStyle/>
+          <a:p>
+            <a:pPr algn="ctr"/>
+          </a:p>
+        </p:txBody>
+      </p:sp>
+      <p:sp>
+        <p:nvSpPr>
+          <p:cNvPr id="26" name="TextBox 25"/>
+          <p:cNvSpPr txBox="1"/>
+          <p:nvPr/>
+        </p:nvSpPr>
+        <p:spPr>
+          <a:xfrm>
+            <a:off x="5394959" y="822960"/>
+            <a:ext cx="457200" cy="274320"/>
+          </a:xfrm>
+          <a:prstGeom prst="rect">
+            <a:avLst/>
+          </a:prstGeom>
+          <a:noFill/>
+        </p:spPr>
+        <p:txBody>
+          <a:bodyPr wrap="none">
+            <a:spAutoFit/>
+          </a:bodyPr>
+          <a:lstStyle/>
+          <a:p>
+            <a:pPr>
+              <a:defRPr sz="1000" b="1">
+                <a:solidFill>
+                  <a:srgbClr val="28A745"/>
+                </a:solidFill>
+              </a:defRPr>
+            </a:pPr>
+            <a:r>
+              <a:t>1.00</a:t>
+            </a:r>
+          </a:p>
+        </p:txBody>
+      </p:sp>
+      <p:sp>
+        <p:nvSpPr>
+          <p:cNvPr id="27" name="Rounded Rectangle 26"/>
+          <p:cNvSpPr/>
+          <p:nvPr/>
+        </p:nvSpPr>
+        <p:spPr>
+          <a:xfrm>
+            <a:off x="6675120" y="1371600"/>
+            <a:ext cx="2194560" cy="2286000"/>
+          </a:xfrm>
+          <a:prstGeom prst="roundRect">
+            <a:avLst/>
+          </a:prstGeom>
+          <a:solidFill>
+            <a:srgbClr val="F0F0F0"/>
+          </a:solidFill>
+          <a:ln>
+            <a:solidFill>
+              <a:srgbClr val="666666"/>
+            </a:solidFill>
+          </a:ln>
+        </p:spPr>
+        <p:style>
+          <a:lnRef idx="1">
+            <a:schemeClr val="accent1"/>
+          </a:lnRef>
+          <a:fillRef idx="3">
+            <a:schemeClr val="accent1"/>
+          </a:fillRef>
+          <a:effectRef idx="2">
+            <a:schemeClr val="accent1"/>
+          </a:effectRef>
+          <a:fontRef idx="minor">
+            <a:schemeClr val="lt1"/>
+          </a:fontRef>
+        </p:style>
+        <p:txBody>
+          <a:bodyPr rtlCol="0" anchor="ctr"/>
+          <a:lstStyle/>
+          <a:p>
+            <a:pPr algn="ctr"/>
+          </a:p>
+        </p:txBody>
+      </p:sp>
+      <p:sp>
+        <p:nvSpPr>
+          <p:cNvPr id="28" name="TextBox 27"/>
+          <p:cNvSpPr txBox="1"/>
+          <p:nvPr/>
+        </p:nvSpPr>
+        <p:spPr>
+          <a:xfrm>
+            <a:off x="6766560" y="1463040"/>
+            <a:ext cx="2011680" cy="2103120"/>
           </a:xfrm>
           <a:prstGeom prst="rect">
             <a:avLst/>
@@ -5189,77 +9439,62 @@
           <a:lstStyle/>
           <a:p>
             <a:pPr>
-              <a:spcAft>
-                <a:spcPts val="1200"/>
-              </a:spcAft>
-              <a:defRPr sz="2000">
-                <a:solidFill>
-                  <a:srgbClr val="333333"/>
-                </a:solidFill>
-              </a:defRPr>
-            </a:pPr>
-            <a:r>
-              <a:t>• API Key authentication with Tinker cloud</a:t>
+              <a:defRPr sz="1300" b="1">
+                <a:solidFill>
+                  <a:srgbClr val="1A1A2E"/>
+                </a:solidFill>
+              </a:defRPr>
+            </a:pPr>
+            <a:r>
+              <a:t>Key Results:</a:t>
             </a:r>
           </a:p>
           <a:p>
             <a:pPr>
-              <a:spcAft>
-                <a:spcPts val="1200"/>
-              </a:spcAft>
-              <a:defRPr sz="2000">
-                <a:solidFill>
-                  <a:srgbClr val="333333"/>
-                </a:solidFill>
-              </a:defRPr>
-            </a:pPr>
-            <a:r>
-              <a:t>• LoRA adapters for efficient fine-tuning (rank 32-128)</a:t>
+              <a:defRPr sz="1100">
+                <a:solidFill>
+                  <a:srgbClr val="666666"/>
+                </a:solidFill>
+              </a:defRPr>
+            </a:pPr>
+            <a:r>
+              <a:t>• 69.5% → 100%</a:t>
             </a:r>
           </a:p>
           <a:p>
             <a:pPr>
-              <a:spcAft>
-                <a:spcPts val="1200"/>
-              </a:spcAft>
-              <a:defRPr sz="2000">
-                <a:solidFill>
-                  <a:srgbClr val="333333"/>
-                </a:solidFill>
-              </a:defRPr>
-            </a:pPr>
-            <a:r>
-              <a:t>• Batch sampling with configurable group sizes</a:t>
+              <a:defRPr sz="1100">
+                <a:solidFill>
+                  <a:srgbClr val="666666"/>
+                </a:solidFill>
+              </a:defRPr>
+            </a:pPr>
+            <a:r>
+              <a:t>• Converged in 20 steps</a:t>
             </a:r>
           </a:p>
           <a:p>
             <a:pPr>
-              <a:spcAft>
-                <a:spcPts val="1200"/>
-              </a:spcAft>
-              <a:defRPr sz="2000">
-                <a:solidFill>
-                  <a:srgbClr val="333333"/>
-                </a:solidFill>
-              </a:defRPr>
-            </a:pPr>
-            <a:r>
-              <a:t>• Metrics logged to JSONL files and optional W&amp;B</a:t>
+              <a:defRPr sz="1100">
+                <a:solidFill>
+                  <a:srgbClr val="666666"/>
+                </a:solidFill>
+              </a:defRPr>
+            </a:pPr>
+            <a:r>
+              <a:t>• ~2 min training</a:t>
             </a:r>
           </a:p>
           <a:p>
             <a:pPr>
-              <a:spcAft>
-                <a:spcPts val="1200"/>
-              </a:spcAft>
-              <a:defRPr sz="2000">
-                <a:solidFill>
-                  <a:srgbClr val="333333"/>
-                </a:solidFill>
-              </a:defRPr>
-            </a:pPr>
-            <a:r>
-              <a:t>• Checkpoint saving for resumable training</a:t>
+              <a:defRPr sz="1100">
+                <a:solidFill>
+                  <a:srgbClr val="666666"/>
+                </a:solidFill>
+              </a:defRPr>
+            </a:pPr>
+            <a:r>
+              <a:t>• Perfect accuracy</a:t>
             </a:r>
           </a:p>
         </p:txBody>
